--- a/docs/proposals/softbank-ultraman-caravan/SoftBank様向け_お見積りご回答.pptx
+++ b/docs/proposals/softbank-ultraman-caravan/SoftBank様向け_お見積りご回答.pptx
@@ -14,6 +14,7 @@
     <p:sldId id="262" r:id="rId13"/>
     <p:sldId id="263" r:id="rId14"/>
     <p:sldId id="264" r:id="rId15"/>
+    <p:sldId id="265" r:id="rId16"/>
   </p:sldIdLst>
   <p:sldSz cx="12191695" cy="6858000" type="screen4x3"/>
   <p:notesSz cx="6858000" cy="9144000"/>
@@ -3436,6 +3437,603 @@
 </p:sld>
 </file>
 
+<file path=ppt/slides/slide10.xml><?xml version="1.0" encoding="utf-8"?>
+<p:sld xmlns:a="http://schemas.openxmlformats.org/drawingml/2006/main" xmlns:p="http://schemas.openxmlformats.org/presentationml/2006/main" xmlns:r="http://schemas.openxmlformats.org/officeDocument/2006/relationships">
+  <p:cSld>
+    <p:spTree>
+      <p:nvGrpSpPr>
+        <p:cNvPr id="1" name=""/>
+        <p:cNvGrpSpPr/>
+        <p:nvPr/>
+      </p:nvGrpSpPr>
+      <p:grpSpPr/>
+      <p:pic>
+        <p:nvPicPr>
+          <p:cNvPr id="2" name="Picture 1" descr="band_header.png"/>
+          <p:cNvPicPr>
+            <a:picLocks noChangeAspect="1"/>
+          </p:cNvPicPr>
+          <p:nvPr/>
+        </p:nvPicPr>
+        <p:blipFill>
+          <a:blip r:embed="rId2"/>
+          <a:stretch>
+            <a:fillRect/>
+          </a:stretch>
+        </p:blipFill>
+        <p:spPr>
+          <a:xfrm>
+            <a:off x="0" y="0"/>
+            <a:ext cx="12191695" cy="786384"/>
+          </a:xfrm>
+          <a:prstGeom prst="rect">
+            <a:avLst/>
+          </a:prstGeom>
+        </p:spPr>
+      </p:pic>
+      <p:sp>
+        <p:nvSpPr>
+          <p:cNvPr id="3" name="TextBox 2"/>
+          <p:cNvSpPr txBox="1"/>
+          <p:nvPr/>
+        </p:nvSpPr>
+        <p:spPr>
+          <a:xfrm>
+            <a:off x="457200" y="73152"/>
+            <a:ext cx="10241280" cy="640080"/>
+          </a:xfrm>
+          <a:prstGeom prst="rect">
+            <a:avLst/>
+          </a:prstGeom>
+          <a:noFill/>
+        </p:spPr>
+        <p:txBody>
+          <a:bodyPr wrap="square" anchor="ctr" lIns="0" rIns="0" tIns="0" bIns="0">
+            <a:spAutoFit/>
+          </a:bodyPr>
+          <a:lstStyle/>
+          <a:p>
+            <a:pPr algn="l">
+              <a:spcAft>
+                <a:spcPts val="500"/>
+              </a:spcAft>
+            </a:pPr>
+            <a:r>
+              <a:rPr sz="2100" b="1">
+                <a:solidFill>
+                  <a:srgbClr val="FFFFFF"/>
+                </a:solidFill>
+                <a:latin typeface="Meiryo"/>
+                <a:ea typeface="Meiryo"/>
+              </a:rPr>
+              <a:t>本お見積りのポイントと次アクション</a:t>
+            </a:r>
+          </a:p>
+        </p:txBody>
+      </p:sp>
+      <p:sp>
+        <p:nvSpPr>
+          <p:cNvPr id="4" name="TextBox 3"/>
+          <p:cNvSpPr txBox="1"/>
+          <p:nvPr/>
+        </p:nvSpPr>
+        <p:spPr>
+          <a:xfrm>
+            <a:off x="502920" y="896112"/>
+            <a:ext cx="11155680" cy="365760"/>
+          </a:xfrm>
+          <a:prstGeom prst="rect">
+            <a:avLst/>
+          </a:prstGeom>
+          <a:noFill/>
+        </p:spPr>
+        <p:txBody>
+          <a:bodyPr wrap="square" anchor="t" lIns="0" rIns="0" tIns="0" bIns="0">
+            <a:spAutoFit/>
+          </a:bodyPr>
+          <a:lstStyle/>
+          <a:p>
+            <a:pPr algn="l">
+              <a:spcAft>
+                <a:spcPts val="500"/>
+              </a:spcAft>
+            </a:pPr>
+            <a:r>
+              <a:rPr sz="1250" b="0">
+                <a:solidFill>
+                  <a:srgbClr val="5A626B"/>
+                </a:solidFill>
+                <a:latin typeface="Meiryo"/>
+                <a:ea typeface="Meiryo"/>
+              </a:rPr>
+              <a:t>ご予算・運用フローともに現行IP様の座組と同一の形でご導入いただけます</a:t>
+            </a:r>
+          </a:p>
+        </p:txBody>
+      </p:sp>
+      <p:sp>
+        <p:nvSpPr>
+          <p:cNvPr id="5" name="TextBox 4"/>
+          <p:cNvSpPr txBox="1"/>
+          <p:nvPr/>
+        </p:nvSpPr>
+        <p:spPr>
+          <a:xfrm>
+            <a:off x="4727448" y="6547104"/>
+            <a:ext cx="2743200" cy="256032"/>
+          </a:xfrm>
+          <a:prstGeom prst="rect">
+            <a:avLst/>
+          </a:prstGeom>
+          <a:noFill/>
+        </p:spPr>
+        <p:txBody>
+          <a:bodyPr wrap="square" anchor="t" lIns="0" rIns="0" tIns="0" bIns="0">
+            <a:spAutoFit/>
+          </a:bodyPr>
+          <a:lstStyle/>
+          <a:p>
+            <a:pPr algn="ctr">
+              <a:spcAft>
+                <a:spcPts val="500"/>
+              </a:spcAft>
+            </a:pPr>
+            <a:r>
+              <a:rPr sz="800" b="0">
+                <a:solidFill>
+                  <a:srgbClr val="8E949B"/>
+                </a:solidFill>
+                <a:latin typeface="Meiryo"/>
+                <a:ea typeface="Meiryo"/>
+              </a:rPr>
+              <a:t>© TSUBURAYA PRODUCTIONS</a:t>
+            </a:r>
+          </a:p>
+        </p:txBody>
+      </p:sp>
+      <p:sp>
+        <p:nvSpPr>
+          <p:cNvPr id="6" name="TextBox 5"/>
+          <p:cNvSpPr txBox="1"/>
+          <p:nvPr/>
+        </p:nvSpPr>
+        <p:spPr>
+          <a:xfrm>
+            <a:off x="9372600" y="6492240"/>
+            <a:ext cx="2011680" cy="274320"/>
+          </a:xfrm>
+          <a:prstGeom prst="rect">
+            <a:avLst/>
+          </a:prstGeom>
+          <a:noFill/>
+        </p:spPr>
+        <p:txBody>
+          <a:bodyPr wrap="square" anchor="t" lIns="0" rIns="0" tIns="0" bIns="0">
+            <a:spAutoFit/>
+          </a:bodyPr>
+          <a:lstStyle/>
+          <a:p>
+            <a:pPr algn="r">
+              <a:spcAft>
+                <a:spcPts val="500"/>
+              </a:spcAft>
+            </a:pPr>
+            <a:r>
+              <a:rPr sz="1000" b="1">
+                <a:solidFill>
+                  <a:srgbClr val="C00000"/>
+                </a:solidFill>
+                <a:latin typeface="Meiryo"/>
+                <a:ea typeface="Meiryo"/>
+              </a:rPr>
+              <a:t>Strictly Confidential</a:t>
+            </a:r>
+          </a:p>
+        </p:txBody>
+      </p:sp>
+      <p:sp>
+        <p:nvSpPr>
+          <p:cNvPr id="7" name="TextBox 6"/>
+          <p:cNvSpPr txBox="1"/>
+          <p:nvPr/>
+        </p:nvSpPr>
+        <p:spPr>
+          <a:xfrm>
+            <a:off x="11521440" y="6492240"/>
+            <a:ext cx="457200" cy="274320"/>
+          </a:xfrm>
+          <a:prstGeom prst="rect">
+            <a:avLst/>
+          </a:prstGeom>
+          <a:noFill/>
+        </p:spPr>
+        <p:txBody>
+          <a:bodyPr wrap="square" anchor="t" lIns="0" rIns="0" tIns="0" bIns="0">
+            <a:spAutoFit/>
+          </a:bodyPr>
+          <a:lstStyle/>
+          <a:p>
+            <a:pPr algn="r">
+              <a:spcAft>
+                <a:spcPts val="500"/>
+              </a:spcAft>
+            </a:pPr>
+            <a:r>
+              <a:rPr sz="1000" b="0">
+                <a:solidFill>
+                  <a:srgbClr val="8E949B"/>
+                </a:solidFill>
+                <a:latin typeface="Meiryo"/>
+                <a:ea typeface="Meiryo"/>
+              </a:rPr>
+              <a:t>10</a:t>
+            </a:r>
+          </a:p>
+        </p:txBody>
+      </p:sp>
+      <p:sp>
+        <p:nvSpPr>
+          <p:cNvPr id="8" name="Rounded Rectangle 7"/>
+          <p:cNvSpPr/>
+          <p:nvPr/>
+        </p:nvSpPr>
+        <p:spPr>
+          <a:xfrm>
+            <a:off x="640080" y="1554480"/>
+            <a:ext cx="10881360" cy="2103120"/>
+          </a:xfrm>
+          <a:prstGeom prst="roundRect">
+            <a:avLst>
+              <a:gd name="adj" fmla="val 5000"/>
+            </a:avLst>
+          </a:prstGeom>
+          <a:solidFill>
+            <a:srgbClr val="F2F4F6"/>
+          </a:solidFill>
+          <a:ln>
+            <a:noFill/>
+          </a:ln>
+          <a:effectLst/>
+        </p:spPr>
+        <p:style>
+          <a:lnRef idx="1">
+            <a:schemeClr val="accent1"/>
+          </a:lnRef>
+          <a:fillRef idx="3">
+            <a:schemeClr val="accent1"/>
+          </a:fillRef>
+          <a:effectRef idx="2">
+            <a:schemeClr val="accent1"/>
+          </a:effectRef>
+          <a:fontRef idx="minor">
+            <a:schemeClr val="lt1"/>
+          </a:fontRef>
+        </p:style>
+        <p:txBody>
+          <a:bodyPr rtlCol="0" anchor="ctr"/>
+          <a:lstStyle/>
+          <a:p>
+            <a:pPr algn="ctr"/>
+          </a:p>
+        </p:txBody>
+      </p:sp>
+      <p:sp>
+        <p:nvSpPr>
+          <p:cNvPr id="9" name="TextBox 8"/>
+          <p:cNvSpPr txBox="1"/>
+          <p:nvPr/>
+        </p:nvSpPr>
+        <p:spPr>
+          <a:xfrm>
+            <a:off x="914400" y="1737360"/>
+            <a:ext cx="10332720" cy="1828800"/>
+          </a:xfrm>
+          <a:prstGeom prst="rect">
+            <a:avLst/>
+          </a:prstGeom>
+          <a:noFill/>
+        </p:spPr>
+        <p:txBody>
+          <a:bodyPr wrap="square" anchor="t" lIns="0" rIns="0" tIns="0" bIns="0">
+            <a:spAutoFit/>
+          </a:bodyPr>
+          <a:lstStyle/>
+          <a:p>
+            <a:pPr algn="l">
+              <a:spcAft>
+                <a:spcPts val="700"/>
+              </a:spcAft>
+            </a:pPr>
+            <a:r>
+              <a:rPr sz="1400" b="1">
+                <a:solidFill>
+                  <a:srgbClr val="C00000"/>
+                </a:solidFill>
+                <a:latin typeface="Meiryo"/>
+                <a:ea typeface="Meiryo"/>
+              </a:rPr>
+              <a:t>本お見積りのポイント</a:t>
+            </a:r>
+          </a:p>
+          <a:p>
+            <a:pPr algn="l">
+              <a:spcAft>
+                <a:spcPts val="700"/>
+              </a:spcAft>
+            </a:pPr>
+            <a:r>
+              <a:rPr sz="1300" b="0">
+                <a:solidFill>
+                  <a:srgbClr val="1A1A1A"/>
+                </a:solidFill>
+                <a:latin typeface="Meiryo"/>
+                <a:ea typeface="Meiryo"/>
+              </a:rPr>
+              <a:t>・年間IP使用料1,650万円+従量型(着ぐるみ15万円/開催・ロイヤリティ10%)のシンプルな3階建て構造</a:t>
+            </a:r>
+          </a:p>
+          <a:p>
+            <a:pPr algn="l">
+              <a:spcAft>
+                <a:spcPts val="700"/>
+              </a:spcAft>
+            </a:pPr>
+            <a:r>
+              <a:rPr sz="1300" b="0">
+                <a:solidFill>
+                  <a:srgbClr val="1A1A1A"/>
+                </a:solidFill>
+                <a:latin typeface="Meiryo"/>
+                <a:ea typeface="Meiryo"/>
+              </a:rPr>
+              <a:t>・ポケモン様の現行運用(形式・体制・料率)と同一の枠組みのため、貴社・代理店様の運用フロー変更が不要</a:t>
+            </a:r>
+          </a:p>
+          <a:p>
+            <a:pPr algn="l">
+              <a:spcAft>
+                <a:spcPts val="700"/>
+              </a:spcAft>
+            </a:pPr>
+            <a:r>
+              <a:rPr sz="1300" b="0">
+                <a:solidFill>
+                  <a:srgbClr val="1A1A1A"/>
+                </a:solidFill>
+                <a:latin typeface="Meiryo"/>
+                <a:ea typeface="Meiryo"/>
+              </a:rPr>
+              <a:t>・60周年イヤーのウルトラマンで「会いに行ける」店頭集客コンテンツを、固定費を抑えて導入可能</a:t>
+            </a:r>
+          </a:p>
+        </p:txBody>
+      </p:sp>
+      <p:graphicFrame>
+        <p:nvGraphicFramePr>
+          <p:cNvPr id="10" name="Table 9"/>
+          <p:cNvGraphicFramePr>
+            <a:graphicFrameLocks noGrp="1"/>
+          </p:cNvGraphicFramePr>
+          <p:nvPr/>
+        </p:nvGraphicFramePr>
+        <p:xfrm>
+          <a:off x="640080" y="3931920"/>
+          <a:ext cx="10881359" cy="1828800"/>
+        </p:xfrm>
+        <a:graphic>
+          <a:graphicData uri="http://schemas.openxmlformats.org/drawingml/2006/table">
+            <a:tbl>
+              <a:tblPr firstRow="1" bandRow="1">
+                <a:tableStyleId>{5C22544A-7EE6-4342-B048-85BDC9FD1C3A}</a:tableStyleId>
+              </a:tblPr>
+              <a:tblGrid>
+                <a:gridCol w="2863515"/>
+                <a:gridCol w="8017844"/>
+              </a:tblGrid>
+              <a:tr h="457200">
+                <a:tc>
+                  <a:txBody>
+                    <a:bodyPr/>
+                    <a:lstStyle/>
+                    <a:p>
+                      <a:r>
+                        <a:rPr sz="1200" b="1">
+                          <a:solidFill>
+                            <a:srgbClr val="FFFFFF"/>
+                          </a:solidFill>
+                          <a:latin typeface="Meiryo"/>
+                          <a:ea typeface="Meiryo"/>
+                        </a:rPr>
+                        <a:t>時期</a:t>
+                      </a:r>
+                    </a:p>
+                  </a:txBody>
+                  <a:tcPr anchor="ctr" marL="73152" marR="73152">
+                    <a:solidFill>
+                      <a:srgbClr val="232278"/>
+                    </a:solidFill>
+                  </a:tcPr>
+                </a:tc>
+                <a:tc>
+                  <a:txBody>
+                    <a:bodyPr/>
+                    <a:lstStyle/>
+                    <a:p>
+                      <a:r>
+                        <a:rPr sz="1200" b="1">
+                          <a:solidFill>
+                            <a:srgbClr val="FFFFFF"/>
+                          </a:solidFill>
+                          <a:latin typeface="Meiryo"/>
+                          <a:ea typeface="Meiryo"/>
+                        </a:rPr>
+                        <a:t>アクション</a:t>
+                      </a:r>
+                    </a:p>
+                  </a:txBody>
+                  <a:tcPr anchor="ctr" marL="73152" marR="73152">
+                    <a:solidFill>
+                      <a:srgbClr val="232278"/>
+                    </a:solidFill>
+                  </a:tcPr>
+                </a:tc>
+              </a:tr>
+              <a:tr h="457200">
+                <a:tc>
+                  <a:txBody>
+                    <a:bodyPr/>
+                    <a:lstStyle/>
+                    <a:p>
+                      <a:r>
+                        <a:rPr sz="1250" b="0">
+                          <a:solidFill>
+                            <a:srgbClr val="1A1A1A"/>
+                          </a:solidFill>
+                          <a:latin typeface="Meiryo"/>
+                          <a:ea typeface="Meiryo"/>
+                        </a:rPr>
+                        <a:t>2026年7月〜8月</a:t>
+                      </a:r>
+                    </a:p>
+                  </a:txBody>
+                  <a:tcPr anchor="ctr" marL="73152" marR="73152">
+                    <a:solidFill>
+                      <a:srgbClr val="FFFFFF"/>
+                    </a:solidFill>
+                  </a:tcPr>
+                </a:tc>
+                <a:tc>
+                  <a:txBody>
+                    <a:bodyPr/>
+                    <a:lstStyle/>
+                    <a:p>
+                      <a:r>
+                        <a:rPr sz="1250" b="0">
+                          <a:solidFill>
+                            <a:srgbClr val="1A1A1A"/>
+                          </a:solidFill>
+                          <a:latin typeface="Meiryo"/>
+                          <a:ea typeface="Meiryo"/>
+                        </a:rPr>
+                        <a:t>本お見積りのご確認・条件協議(契約書ドラフトのご提示)</a:t>
+                      </a:r>
+                    </a:p>
+                  </a:txBody>
+                  <a:tcPr anchor="ctr" marL="73152" marR="73152">
+                    <a:solidFill>
+                      <a:srgbClr val="FFFFFF"/>
+                    </a:solidFill>
+                  </a:tcPr>
+                </a:tc>
+              </a:tr>
+              <a:tr h="457200">
+                <a:tc>
+                  <a:txBody>
+                    <a:bodyPr/>
+                    <a:lstStyle/>
+                    <a:p>
+                      <a:r>
+                        <a:rPr sz="1250" b="0">
+                          <a:solidFill>
+                            <a:srgbClr val="1A1A1A"/>
+                          </a:solidFill>
+                          <a:latin typeface="Meiryo"/>
+                          <a:ea typeface="Meiryo"/>
+                        </a:rPr>
+                        <a:t>2026年9月〜12月</a:t>
+                      </a:r>
+                    </a:p>
+                  </a:txBody>
+                  <a:tcPr anchor="ctr" marL="73152" marR="73152">
+                    <a:solidFill>
+                      <a:srgbClr val="F2F4F6"/>
+                    </a:solidFill>
+                  </a:tcPr>
+                </a:tc>
+                <a:tc>
+                  <a:txBody>
+                    <a:bodyPr/>
+                    <a:lstStyle/>
+                    <a:p>
+                      <a:r>
+                        <a:rPr sz="1250" b="0">
+                          <a:solidFill>
+                            <a:srgbClr val="1A1A1A"/>
+                          </a:solidFill>
+                          <a:latin typeface="Meiryo"/>
+                          <a:ea typeface="Meiryo"/>
+                        </a:rPr>
+                        <a:t>キット・訴求ツールのデザイン監修、着ぐるみ供給体制の整備、FY26中テストの個別協議</a:t>
+                      </a:r>
+                    </a:p>
+                  </a:txBody>
+                  <a:tcPr anchor="ctr" marL="73152" marR="73152">
+                    <a:solidFill>
+                      <a:srgbClr val="F2F4F6"/>
+                    </a:solidFill>
+                  </a:tcPr>
+                </a:tc>
+              </a:tr>
+              <a:tr h="457200">
+                <a:tc>
+                  <a:txBody>
+                    <a:bodyPr/>
+                    <a:lstStyle/>
+                    <a:p>
+                      <a:r>
+                        <a:rPr sz="1250" b="1">
+                          <a:solidFill>
+                            <a:srgbClr val="C00000"/>
+                          </a:solidFill>
+                          <a:latin typeface="Meiryo"/>
+                          <a:ea typeface="Meiryo"/>
+                        </a:rPr>
+                        <a:t>2027年4月</a:t>
+                      </a:r>
+                    </a:p>
+                  </a:txBody>
+                  <a:tcPr anchor="ctr" marL="73152" marR="73152">
+                    <a:solidFill>
+                      <a:srgbClr val="FFFFFF"/>
+                    </a:solidFill>
+                  </a:tcPr>
+                </a:tc>
+                <a:tc>
+                  <a:txBody>
+                    <a:bodyPr/>
+                    <a:lstStyle/>
+                    <a:p>
+                      <a:r>
+                        <a:rPr sz="1250" b="1">
+                          <a:solidFill>
+                            <a:srgbClr val="C00000"/>
+                          </a:solidFill>
+                          <a:latin typeface="Meiryo"/>
+                          <a:ea typeface="Meiryo"/>
+                        </a:rPr>
+                        <a:t>年間契約開始・全国展開スタート(FY27)</a:t>
+                      </a:r>
+                    </a:p>
+                  </a:txBody>
+                  <a:tcPr anchor="ctr" marL="73152" marR="73152">
+                    <a:solidFill>
+                      <a:srgbClr val="FFFFFF"/>
+                    </a:solidFill>
+                  </a:tcPr>
+                </a:tc>
+              </a:tr>
+            </a:tbl>
+          </a:graphicData>
+        </a:graphic>
+      </p:graphicFrame>
+    </p:spTree>
+  </p:cSld>
+  <p:clrMapOvr>
+    <a:masterClrMapping/>
+  </p:clrMapOvr>
+</p:sld>
+</file>
+
 <file path=ppt/slides/slide2.xml><?xml version="1.0" encoding="utf-8"?>
 <p:sld xmlns:a="http://schemas.openxmlformats.org/drawingml/2006/main" xmlns:p="http://schemas.openxmlformats.org/presentationml/2006/main" xmlns:r="http://schemas.openxmlformats.org/officeDocument/2006/relationships">
   <p:cSld>
@@ -6973,7 +7571,7 @@
                 <a:latin typeface="Meiryo"/>
                 <a:ea typeface="Meiryo"/>
               </a:rPr>
-              <a:t>年間費用の概算シミュレーション</a:t>
+              <a:t>ご参考:作成物の想定数量とロイヤリティ概算</a:t>
             </a:r>
           </a:p>
         </p:txBody>
@@ -7013,7 +7611,7 @@
                 <a:latin typeface="Meiryo"/>
                 <a:ea typeface="Meiryo"/>
               </a:rPr>
-              <a:t>貴社想定の開催数(着ぐるみ600開催/キット20,000開催)をそのまま当てはめた場合の年間概算です</a:t>
+              <a:t>貴社資料の実績数量・単価(キット構成、ノベルティ4,000セット前提)に基づく参考試算です</a:t>
             </a:r>
           </a:p>
         </p:txBody>
@@ -7148,7 +7746,7 @@
         </p:nvGraphicFramePr>
         <p:xfrm>
           <a:off x="640080" y="1508760"/>
-          <a:ext cx="10881358" cy="2514600"/>
+          <a:ext cx="10881356" cy="2834640"/>
         </p:xfrm>
         <a:graphic>
           <a:graphicData uri="http://schemas.openxmlformats.org/drawingml/2006/table">
@@ -7157,12 +7755,13 @@
                 <a:tableStyleId>{5C22544A-7EE6-4342-B048-85BDC9FD1C3A}</a:tableStyleId>
               </a:tblPr>
               <a:tblGrid>
-                <a:gridCol w="3079630"/>
-                <a:gridCol w="2258395"/>
-                <a:gridCol w="2669012"/>
-                <a:gridCol w="2874321"/>
+                <a:gridCol w="2720339"/>
+                <a:gridCol w="3083051"/>
+                <a:gridCol w="1994916"/>
+                <a:gridCol w="1450847"/>
+                <a:gridCol w="1632203"/>
               </a:tblGrid>
-              <a:tr h="502920">
+              <a:tr h="566928">
                 <a:tc>
                   <a:txBody>
                     <a:bodyPr/>
@@ -7176,7 +7775,7 @@
                           <a:latin typeface="Meiryo"/>
                           <a:ea typeface="Meiryo"/>
                         </a:rPr>
-                        <a:t>費用項目</a:t>
+                        <a:t>作成物</a:t>
                       </a:r>
                     </a:p>
                   </a:txBody>
@@ -7199,7 +7798,7 @@
                           <a:latin typeface="Meiryo"/>
                           <a:ea typeface="Meiryo"/>
                         </a:rPr>
-                        <a:t>単価・料率</a:t>
+                        <a:t>想定数量(年間)</a:t>
                       </a:r>
                     </a:p>
                   </a:txBody>
@@ -7222,7 +7821,7 @@
                           <a:latin typeface="Meiryo"/>
                           <a:ea typeface="Meiryo"/>
                         </a:rPr>
-                        <a:t>貴社想定規模</a:t>
+                        <a:t>単価目安(貴社資料より)</a:t>
                       </a:r>
                     </a:p>
                   </a:txBody>
@@ -7245,7 +7844,7 @@
                           <a:latin typeface="Meiryo"/>
                           <a:ea typeface="Meiryo"/>
                         </a:rPr>
-                        <a:t>年間概算</a:t>
+                        <a:t>作成費概算</a:t>
                       </a:r>
                     </a:p>
                   </a:txBody>
@@ -7255,22 +7854,45 @@
                     </a:solidFill>
                   </a:tcPr>
                 </a:tc>
+                <a:tc>
+                  <a:txBody>
+                    <a:bodyPr/>
+                    <a:lstStyle/>
+                    <a:p>
+                      <a:r>
+                        <a:rPr sz="1200" b="1">
+                          <a:solidFill>
+                            <a:srgbClr val="FFFFFF"/>
+                          </a:solidFill>
+                          <a:latin typeface="Meiryo"/>
+                          <a:ea typeface="Meiryo"/>
+                        </a:rPr>
+                        <a:t>ロイヤリティ(10%)</a:t>
+                      </a:r>
+                    </a:p>
+                  </a:txBody>
+                  <a:tcPr anchor="ctr" marL="73152" marR="73152">
+                    <a:solidFill>
+                      <a:srgbClr val="232278"/>
+                    </a:solidFill>
+                  </a:tcPr>
+                </a:tc>
               </a:tr>
-              <a:tr h="502920">
-                <a:tc>
-                  <a:txBody>
-                    <a:bodyPr/>
-                    <a:lstStyle/>
-                    <a:p>
-                      <a:r>
-                        <a:rPr sz="1200" b="0">
+              <a:tr h="566928">
+                <a:tc>
+                  <a:txBody>
+                    <a:bodyPr/>
+                    <a:lstStyle/>
+                    <a:p>
+                      <a:r>
+                        <a:rPr sz="1100" b="0">
                           <a:solidFill>
                             <a:srgbClr val="1A1A1A"/>
                           </a:solidFill>
                           <a:latin typeface="Meiryo"/>
                           <a:ea typeface="Meiryo"/>
                         </a:rPr>
-                        <a:t>① 年間IP使用料(固定)</a:t>
+                        <a:t>イベントキット(ゲームキット一式)</a:t>
                       </a:r>
                     </a:p>
                   </a:txBody>
@@ -7286,30 +7908,381 @@
                     <a:lstStyle/>
                     <a:p>
                       <a:r>
-                        <a:rPr sz="1200" b="0">
+                        <a:rPr sz="1100" b="0">
                           <a:solidFill>
                             <a:srgbClr val="1A1A1A"/>
                           </a:solidFill>
                           <a:latin typeface="Meiryo"/>
                           <a:ea typeface="Meiryo"/>
                         </a:rPr>
+                        <a:t>約500キット(週400開催の同時稼働+予備・更新分)</a:t>
+                      </a:r>
+                    </a:p>
+                  </a:txBody>
+                  <a:tcPr anchor="ctr" marL="73152" marR="73152">
+                    <a:solidFill>
+                      <a:srgbClr val="FFFFFF"/>
+                    </a:solidFill>
+                  </a:tcPr>
+                </a:tc>
+                <a:tc>
+                  <a:txBody>
+                    <a:bodyPr/>
+                    <a:lstStyle/>
+                    <a:p>
+                      <a:r>
+                        <a:rPr sz="1100" b="0">
+                          <a:solidFill>
+                            <a:srgbClr val="1A1A1A"/>
+                          </a:solidFill>
+                          <a:latin typeface="Meiryo"/>
+                          <a:ea typeface="Meiryo"/>
+                        </a:rPr>
+                        <a:t>約15.5万円/キット</a:t>
+                      </a:r>
+                    </a:p>
+                  </a:txBody>
+                  <a:tcPr anchor="ctr" marL="73152" marR="73152">
+                    <a:solidFill>
+                      <a:srgbClr val="FFFFFF"/>
+                    </a:solidFill>
+                  </a:tcPr>
+                </a:tc>
+                <a:tc>
+                  <a:txBody>
+                    <a:bodyPr/>
+                    <a:lstStyle/>
+                    <a:p>
+                      <a:r>
+                        <a:rPr sz="1100" b="0">
+                          <a:solidFill>
+                            <a:srgbClr val="1A1A1A"/>
+                          </a:solidFill>
+                          <a:latin typeface="Meiryo"/>
+                          <a:ea typeface="Meiryo"/>
+                        </a:rPr>
+                        <a:t>約7,800万円</a:t>
+                      </a:r>
+                    </a:p>
+                  </a:txBody>
+                  <a:tcPr anchor="ctr" marL="73152" marR="73152">
+                    <a:solidFill>
+                      <a:srgbClr val="FFFFFF"/>
+                    </a:solidFill>
+                  </a:tcPr>
+                </a:tc>
+                <a:tc>
+                  <a:txBody>
+                    <a:bodyPr/>
+                    <a:lstStyle/>
+                    <a:p>
+                      <a:r>
+                        <a:rPr sz="1100" b="0">
+                          <a:solidFill>
+                            <a:srgbClr val="1A1A1A"/>
+                          </a:solidFill>
+                          <a:latin typeface="Meiryo"/>
+                          <a:ea typeface="Meiryo"/>
+                        </a:rPr>
+                        <a:t>約780万円</a:t>
+                      </a:r>
+                    </a:p>
+                  </a:txBody>
+                  <a:tcPr anchor="ctr" marL="73152" marR="73152">
+                    <a:solidFill>
+                      <a:srgbClr val="FFFFFF"/>
+                    </a:solidFill>
+                  </a:tcPr>
+                </a:tc>
+              </a:tr>
+              <a:tr h="566928">
+                <a:tc>
+                  <a:txBody>
+                    <a:bodyPr/>
+                    <a:lstStyle/>
+                    <a:p>
+                      <a:r>
+                        <a:rPr sz="1100" b="0">
+                          <a:solidFill>
+                            <a:srgbClr val="1A1A1A"/>
+                          </a:solidFill>
+                          <a:latin typeface="Meiryo"/>
+                          <a:ea typeface="Meiryo"/>
+                        </a:rPr>
+                        <a:t>ノベルティ</a:t>
+                      </a:r>
+                    </a:p>
+                  </a:txBody>
+                  <a:tcPr anchor="ctr" marL="73152" marR="73152">
+                    <a:solidFill>
+                      <a:srgbClr val="F2F4F6"/>
+                    </a:solidFill>
+                  </a:tcPr>
+                </a:tc>
+                <a:tc>
+                  <a:txBody>
+                    <a:bodyPr/>
+                    <a:lstStyle/>
+                    <a:p>
+                      <a:r>
+                        <a:rPr sz="1100" b="0">
+                          <a:solidFill>
+                            <a:srgbClr val="1A1A1A"/>
+                          </a:solidFill>
+                          <a:latin typeface="Meiryo"/>
+                          <a:ea typeface="Meiryo"/>
+                        </a:rPr>
+                        <a:t>4,000セット(1セット=A〜D賞+参加賞327個、計約130万個)</a:t>
+                      </a:r>
+                    </a:p>
+                  </a:txBody>
+                  <a:tcPr anchor="ctr" marL="73152" marR="73152">
+                    <a:solidFill>
+                      <a:srgbClr val="F2F4F6"/>
+                    </a:solidFill>
+                  </a:tcPr>
+                </a:tc>
+                <a:tc>
+                  <a:txBody>
+                    <a:bodyPr/>
+                    <a:lstStyle/>
+                    <a:p>
+                      <a:r>
+                        <a:rPr sz="1100" b="0">
+                          <a:solidFill>
+                            <a:srgbClr val="1A1A1A"/>
+                          </a:solidFill>
+                          <a:latin typeface="Meiryo"/>
+                          <a:ea typeface="Meiryo"/>
+                        </a:rPr>
+                        <a:t>約9,900円/セット</a:t>
+                      </a:r>
+                    </a:p>
+                  </a:txBody>
+                  <a:tcPr anchor="ctr" marL="73152" marR="73152">
+                    <a:solidFill>
+                      <a:srgbClr val="F2F4F6"/>
+                    </a:solidFill>
+                  </a:tcPr>
+                </a:tc>
+                <a:tc>
+                  <a:txBody>
+                    <a:bodyPr/>
+                    <a:lstStyle/>
+                    <a:p>
+                      <a:r>
+                        <a:rPr sz="1100" b="0">
+                          <a:solidFill>
+                            <a:srgbClr val="1A1A1A"/>
+                          </a:solidFill>
+                          <a:latin typeface="Meiryo"/>
+                          <a:ea typeface="Meiryo"/>
+                        </a:rPr>
+                        <a:t>約4,000万円</a:t>
+                      </a:r>
+                    </a:p>
+                  </a:txBody>
+                  <a:tcPr anchor="ctr" marL="73152" marR="73152">
+                    <a:solidFill>
+                      <a:srgbClr val="F2F4F6"/>
+                    </a:solidFill>
+                  </a:tcPr>
+                </a:tc>
+                <a:tc>
+                  <a:txBody>
+                    <a:bodyPr/>
+                    <a:lstStyle/>
+                    <a:p>
+                      <a:r>
+                        <a:rPr sz="1100" b="0">
+                          <a:solidFill>
+                            <a:srgbClr val="1A1A1A"/>
+                          </a:solidFill>
+                          <a:latin typeface="Meiryo"/>
+                          <a:ea typeface="Meiryo"/>
+                        </a:rPr>
+                        <a:t>約400万円</a:t>
+                      </a:r>
+                    </a:p>
+                  </a:txBody>
+                  <a:tcPr anchor="ctr" marL="73152" marR="73152">
+                    <a:solidFill>
+                      <a:srgbClr val="F2F4F6"/>
+                    </a:solidFill>
+                  </a:tcPr>
+                </a:tc>
+              </a:tr>
+              <a:tr h="566928">
+                <a:tc>
+                  <a:txBody>
+                    <a:bodyPr/>
+                    <a:lstStyle/>
+                    <a:p>
+                      <a:r>
+                        <a:rPr sz="1100" b="0">
+                          <a:solidFill>
+                            <a:srgbClr val="1A1A1A"/>
+                          </a:solidFill>
+                          <a:latin typeface="Meiryo"/>
+                          <a:ea typeface="Meiryo"/>
+                        </a:rPr>
+                        <a:t>店頭訴求ツール(ポスター・POP・什器シート等)</a:t>
+                      </a:r>
+                    </a:p>
+                  </a:txBody>
+                  <a:tcPr anchor="ctr" marL="73152" marR="73152">
+                    <a:solidFill>
+                      <a:srgbClr val="FFFFFF"/>
+                    </a:solidFill>
+                  </a:tcPr>
+                </a:tc>
+                <a:tc>
+                  <a:txBody>
+                    <a:bodyPr/>
+                    <a:lstStyle/>
+                    <a:p>
+                      <a:r>
+                        <a:rPr sz="1100" b="0">
+                          <a:solidFill>
+                            <a:srgbClr val="1A1A1A"/>
+                          </a:solidFill>
+                          <a:latin typeface="Meiryo"/>
+                          <a:ea typeface="Meiryo"/>
+                        </a:rPr>
+                        <a:t>約3,000店×年2回更新</a:t>
+                      </a:r>
+                    </a:p>
+                  </a:txBody>
+                  <a:tcPr anchor="ctr" marL="73152" marR="73152">
+                    <a:solidFill>
+                      <a:srgbClr val="FFFFFF"/>
+                    </a:solidFill>
+                  </a:tcPr>
+                </a:tc>
+                <a:tc>
+                  <a:txBody>
+                    <a:bodyPr/>
+                    <a:lstStyle/>
+                    <a:p>
+                      <a:r>
+                        <a:rPr sz="1100" b="0">
+                          <a:solidFill>
+                            <a:srgbClr val="1A1A1A"/>
+                          </a:solidFill>
+                          <a:latin typeface="Meiryo"/>
+                          <a:ea typeface="Meiryo"/>
+                        </a:rPr>
+                        <a:t>約2,500円/店・回</a:t>
+                      </a:r>
+                    </a:p>
+                  </a:txBody>
+                  <a:tcPr anchor="ctr" marL="73152" marR="73152">
+                    <a:solidFill>
+                      <a:srgbClr val="FFFFFF"/>
+                    </a:solidFill>
+                  </a:tcPr>
+                </a:tc>
+                <a:tc>
+                  <a:txBody>
+                    <a:bodyPr/>
+                    <a:lstStyle/>
+                    <a:p>
+                      <a:r>
+                        <a:rPr sz="1100" b="0">
+                          <a:solidFill>
+                            <a:srgbClr val="1A1A1A"/>
+                          </a:solidFill>
+                          <a:latin typeface="Meiryo"/>
+                          <a:ea typeface="Meiryo"/>
+                        </a:rPr>
+                        <a:t>約1,500万円</a:t>
+                      </a:r>
+                    </a:p>
+                  </a:txBody>
+                  <a:tcPr anchor="ctr" marL="73152" marR="73152">
+                    <a:solidFill>
+                      <a:srgbClr val="FFFFFF"/>
+                    </a:solidFill>
+                  </a:tcPr>
+                </a:tc>
+                <a:tc>
+                  <a:txBody>
+                    <a:bodyPr/>
+                    <a:lstStyle/>
+                    <a:p>
+                      <a:r>
+                        <a:rPr sz="1100" b="0">
+                          <a:solidFill>
+                            <a:srgbClr val="1A1A1A"/>
+                          </a:solidFill>
+                          <a:latin typeface="Meiryo"/>
+                          <a:ea typeface="Meiryo"/>
+                        </a:rPr>
+                        <a:t>約150万円</a:t>
+                      </a:r>
+                    </a:p>
+                  </a:txBody>
+                  <a:tcPr anchor="ctr" marL="73152" marR="73152">
+                    <a:solidFill>
+                      <a:srgbClr val="FFFFFF"/>
+                    </a:solidFill>
+                  </a:tcPr>
+                </a:tc>
+              </a:tr>
+              <a:tr h="566928">
+                <a:tc>
+                  <a:txBody>
+                    <a:bodyPr/>
+                    <a:lstStyle/>
+                    <a:p>
+                      <a:r>
+                        <a:rPr sz="1100" b="1">
+                          <a:solidFill>
+                            <a:srgbClr val="1A1A1A"/>
+                          </a:solidFill>
+                          <a:latin typeface="Meiryo"/>
+                          <a:ea typeface="Meiryo"/>
+                        </a:rPr>
+                        <a:t>合計</a:t>
+                      </a:r>
+                    </a:p>
+                  </a:txBody>
+                  <a:tcPr anchor="ctr" marL="73152" marR="73152">
+                    <a:solidFill>
+                      <a:srgbClr val="F2F4F6"/>
+                    </a:solidFill>
+                  </a:tcPr>
+                </a:tc>
+                <a:tc>
+                  <a:txBody>
+                    <a:bodyPr/>
+                    <a:lstStyle/>
+                    <a:p>
+                      <a:r>
+                        <a:rPr sz="1100" b="0">
+                          <a:solidFill>
+                            <a:srgbClr val="1A1A1A"/>
+                          </a:solidFill>
+                          <a:latin typeface="Meiryo"/>
+                          <a:ea typeface="Meiryo"/>
+                        </a:rPr>
                         <a:t>—</a:t>
                       </a:r>
                     </a:p>
                   </a:txBody>
                   <a:tcPr anchor="ctr" marL="73152" marR="73152">
                     <a:solidFill>
-                      <a:srgbClr val="FFFFFF"/>
-                    </a:solidFill>
-                  </a:tcPr>
-                </a:tc>
-                <a:tc>
-                  <a:txBody>
-                    <a:bodyPr/>
-                    <a:lstStyle/>
-                    <a:p>
-                      <a:r>
-                        <a:rPr sz="1200" b="0">
+                      <a:srgbClr val="F2F4F6"/>
+                    </a:solidFill>
+                  </a:tcPr>
+                </a:tc>
+                <a:tc>
+                  <a:txBody>
+                    <a:bodyPr/>
+                    <a:lstStyle/>
+                    <a:p>
+                      <a:r>
+                        <a:rPr sz="1100" b="0">
                           <a:solidFill>
                             <a:srgbClr val="1A1A1A"/>
                           </a:solidFill>
@@ -7322,306 +8295,47 @@
                   </a:txBody>
                   <a:tcPr anchor="ctr" marL="73152" marR="73152">
                     <a:solidFill>
-                      <a:srgbClr val="FFFFFF"/>
-                    </a:solidFill>
-                  </a:tcPr>
-                </a:tc>
-                <a:tc>
-                  <a:txBody>
-                    <a:bodyPr/>
-                    <a:lstStyle/>
-                    <a:p>
-                      <a:r>
-                        <a:rPr sz="1200" b="1">
+                      <a:srgbClr val="F2F4F6"/>
+                    </a:solidFill>
+                  </a:tcPr>
+                </a:tc>
+                <a:tc>
+                  <a:txBody>
+                    <a:bodyPr/>
+                    <a:lstStyle/>
+                    <a:p>
+                      <a:r>
+                        <a:rPr sz="1100" b="1">
+                          <a:solidFill>
+                            <a:srgbClr val="1A1A1A"/>
+                          </a:solidFill>
+                          <a:latin typeface="Meiryo"/>
+                          <a:ea typeface="Meiryo"/>
+                        </a:rPr>
+                        <a:t>約1.3億円</a:t>
+                      </a:r>
+                    </a:p>
+                  </a:txBody>
+                  <a:tcPr anchor="ctr" marL="73152" marR="73152">
+                    <a:solidFill>
+                      <a:srgbClr val="F2F4F6"/>
+                    </a:solidFill>
+                  </a:tcPr>
+                </a:tc>
+                <a:tc>
+                  <a:txBody>
+                    <a:bodyPr/>
+                    <a:lstStyle/>
+                    <a:p>
+                      <a:r>
+                        <a:rPr sz="1100" b="1">
                           <a:solidFill>
                             <a:srgbClr val="C00000"/>
                           </a:solidFill>
                           <a:latin typeface="Meiryo"/>
                           <a:ea typeface="Meiryo"/>
                         </a:rPr>
-                        <a:t>1,650万円</a:t>
-                      </a:r>
-                    </a:p>
-                  </a:txBody>
-                  <a:tcPr anchor="ctr" marL="73152" marR="73152">
-                    <a:solidFill>
-                      <a:srgbClr val="FFFFFF"/>
-                    </a:solidFill>
-                  </a:tcPr>
-                </a:tc>
-              </a:tr>
-              <a:tr h="502920">
-                <a:tc>
-                  <a:txBody>
-                    <a:bodyPr/>
-                    <a:lstStyle/>
-                    <a:p>
-                      <a:r>
-                        <a:rPr sz="1200" b="0">
-                          <a:solidFill>
-                            <a:srgbClr val="1A1A1A"/>
-                          </a:solidFill>
-                          <a:latin typeface="Meiryo"/>
-                          <a:ea typeface="Meiryo"/>
-                        </a:rPr>
-                        <a:t>② 着ぐるみイベント</a:t>
-                      </a:r>
-                    </a:p>
-                  </a:txBody>
-                  <a:tcPr anchor="ctr" marL="73152" marR="73152">
-                    <a:solidFill>
-                      <a:srgbClr val="F2F4F6"/>
-                    </a:solidFill>
-                  </a:tcPr>
-                </a:tc>
-                <a:tc>
-                  <a:txBody>
-                    <a:bodyPr/>
-                    <a:lstStyle/>
-                    <a:p>
-                      <a:r>
-                        <a:rPr sz="1200" b="0">
-                          <a:solidFill>
-                            <a:srgbClr val="1A1A1A"/>
-                          </a:solidFill>
-                          <a:latin typeface="Meiryo"/>
-                          <a:ea typeface="Meiryo"/>
-                        </a:rPr>
-                        <a:t>15万円/開催(土日)</a:t>
-                      </a:r>
-                    </a:p>
-                  </a:txBody>
-                  <a:tcPr anchor="ctr" marL="73152" marR="73152">
-                    <a:solidFill>
-                      <a:srgbClr val="F2F4F6"/>
-                    </a:solidFill>
-                  </a:tcPr>
-                </a:tc>
-                <a:tc>
-                  <a:txBody>
-                    <a:bodyPr/>
-                    <a:lstStyle/>
-                    <a:p>
-                      <a:r>
-                        <a:rPr sz="1200" b="0">
-                          <a:solidFill>
-                            <a:srgbClr val="1A1A1A"/>
-                          </a:solidFill>
-                          <a:latin typeface="Meiryo"/>
-                          <a:ea typeface="Meiryo"/>
-                        </a:rPr>
-                        <a:t>600開催/年</a:t>
-                      </a:r>
-                    </a:p>
-                  </a:txBody>
-                  <a:tcPr anchor="ctr" marL="73152" marR="73152">
-                    <a:solidFill>
-                      <a:srgbClr val="F2F4F6"/>
-                    </a:solidFill>
-                  </a:tcPr>
-                </a:tc>
-                <a:tc>
-                  <a:txBody>
-                    <a:bodyPr/>
-                    <a:lstStyle/>
-                    <a:p>
-                      <a:r>
-                        <a:rPr sz="1200" b="0">
-                          <a:solidFill>
-                            <a:srgbClr val="1A1A1A"/>
-                          </a:solidFill>
-                          <a:latin typeface="Meiryo"/>
-                          <a:ea typeface="Meiryo"/>
-                        </a:rPr>
-                        <a:t>約9,000万円(従量)</a:t>
-                      </a:r>
-                    </a:p>
-                  </a:txBody>
-                  <a:tcPr anchor="ctr" marL="73152" marR="73152">
-                    <a:solidFill>
-                      <a:srgbClr val="F2F4F6"/>
-                    </a:solidFill>
-                  </a:tcPr>
-                </a:tc>
-              </a:tr>
-              <a:tr h="502920">
-                <a:tc>
-                  <a:txBody>
-                    <a:bodyPr/>
-                    <a:lstStyle/>
-                    <a:p>
-                      <a:r>
-                        <a:rPr sz="1200" b="0">
-                          <a:solidFill>
-                            <a:srgbClr val="1A1A1A"/>
-                          </a:solidFill>
-                          <a:latin typeface="Meiryo"/>
-                          <a:ea typeface="Meiryo"/>
-                        </a:rPr>
-                        <a:t>  ステージショー(任意)</a:t>
-                      </a:r>
-                    </a:p>
-                  </a:txBody>
-                  <a:tcPr anchor="ctr" marL="73152" marR="73152">
-                    <a:solidFill>
-                      <a:srgbClr val="FFFFFF"/>
-                    </a:solidFill>
-                  </a:tcPr>
-                </a:tc>
-                <a:tc>
-                  <a:txBody>
-                    <a:bodyPr/>
-                    <a:lstStyle/>
-                    <a:p>
-                      <a:r>
-                        <a:rPr sz="1200" b="0">
-                          <a:solidFill>
-                            <a:srgbClr val="1A1A1A"/>
-                          </a:solidFill>
-                          <a:latin typeface="Meiryo"/>
-                          <a:ea typeface="Meiryo"/>
-                        </a:rPr>
-                        <a:t>30万円〜/回</a:t>
-                      </a:r>
-                    </a:p>
-                  </a:txBody>
-                  <a:tcPr anchor="ctr" marL="73152" marR="73152">
-                    <a:solidFill>
-                      <a:srgbClr val="FFFFFF"/>
-                    </a:solidFill>
-                  </a:tcPr>
-                </a:tc>
-                <a:tc>
-                  <a:txBody>
-                    <a:bodyPr/>
-                    <a:lstStyle/>
-                    <a:p>
-                      <a:r>
-                        <a:rPr sz="1200" b="0">
-                          <a:solidFill>
-                            <a:srgbClr val="1A1A1A"/>
-                          </a:solidFill>
-                          <a:latin typeface="Meiryo"/>
-                          <a:ea typeface="Meiryo"/>
-                        </a:rPr>
-                        <a:t>年10回程度まで</a:t>
-                      </a:r>
-                    </a:p>
-                  </a:txBody>
-                  <a:tcPr anchor="ctr" marL="73152" marR="73152">
-                    <a:solidFill>
-                      <a:srgbClr val="FFFFFF"/>
-                    </a:solidFill>
-                  </a:tcPr>
-                </a:tc>
-                <a:tc>
-                  <a:txBody>
-                    <a:bodyPr/>
-                    <a:lstStyle/>
-                    <a:p>
-                      <a:r>
-                        <a:rPr sz="1200" b="0">
-                          <a:solidFill>
-                            <a:srgbClr val="1A1A1A"/>
-                          </a:solidFill>
-                          <a:latin typeface="Meiryo"/>
-                          <a:ea typeface="Meiryo"/>
-                        </a:rPr>
-                        <a:t>〜約300万円(任意)</a:t>
-                      </a:r>
-                    </a:p>
-                  </a:txBody>
-                  <a:tcPr anchor="ctr" marL="73152" marR="73152">
-                    <a:solidFill>
-                      <a:srgbClr val="FFFFFF"/>
-                    </a:solidFill>
-                  </a:tcPr>
-                </a:tc>
-              </a:tr>
-              <a:tr h="502920">
-                <a:tc>
-                  <a:txBody>
-                    <a:bodyPr/>
-                    <a:lstStyle/>
-                    <a:p>
-                      <a:r>
-                        <a:rPr sz="1200" b="0">
-                          <a:solidFill>
-                            <a:srgbClr val="1A1A1A"/>
-                          </a:solidFill>
-                          <a:latin typeface="Meiryo"/>
-                          <a:ea typeface="Meiryo"/>
-                        </a:rPr>
-                        <a:t>③ 作成許諾ロイヤリティ</a:t>
-                      </a:r>
-                    </a:p>
-                  </a:txBody>
-                  <a:tcPr anchor="ctr" marL="73152" marR="73152">
-                    <a:solidFill>
-                      <a:srgbClr val="F2F4F6"/>
-                    </a:solidFill>
-                  </a:tcPr>
-                </a:tc>
-                <a:tc>
-                  <a:txBody>
-                    <a:bodyPr/>
-                    <a:lstStyle/>
-                    <a:p>
-                      <a:r>
-                        <a:rPr sz="1200" b="0">
-                          <a:solidFill>
-                            <a:srgbClr val="1A1A1A"/>
-                          </a:solidFill>
-                          <a:latin typeface="Meiryo"/>
-                          <a:ea typeface="Meiryo"/>
-                        </a:rPr>
-                        <a:t>作成費用の10%</a:t>
-                      </a:r>
-                    </a:p>
-                  </a:txBody>
-                  <a:tcPr anchor="ctr" marL="73152" marR="73152">
-                    <a:solidFill>
-                      <a:srgbClr val="F2F4F6"/>
-                    </a:solidFill>
-                  </a:tcPr>
-                </a:tc>
-                <a:tc>
-                  <a:txBody>
-                    <a:bodyPr/>
-                    <a:lstStyle/>
-                    <a:p>
-                      <a:r>
-                        <a:rPr sz="1200" b="0">
-                          <a:solidFill>
-                            <a:srgbClr val="1A1A1A"/>
-                          </a:solidFill>
-                          <a:latin typeface="Meiryo"/>
-                          <a:ea typeface="Meiryo"/>
-                        </a:rPr>
-                        <a:t>キット・ノベルティ・訴求ツール</a:t>
-                      </a:r>
-                    </a:p>
-                  </a:txBody>
-                  <a:tcPr anchor="ctr" marL="73152" marR="73152">
-                    <a:solidFill>
-                      <a:srgbClr val="F2F4F6"/>
-                    </a:solidFill>
-                  </a:tcPr>
-                </a:tc>
-                <a:tc>
-                  <a:txBody>
-                    <a:bodyPr/>
-                    <a:lstStyle/>
-                    <a:p>
-                      <a:r>
-                        <a:rPr sz="1200" b="0">
-                          <a:solidFill>
-                            <a:srgbClr val="1A1A1A"/>
-                          </a:solidFill>
-                          <a:latin typeface="Meiryo"/>
-                          <a:ea typeface="Meiryo"/>
-                        </a:rPr>
-                        <a:t>作成費用に応じて(従量)</a:t>
+                        <a:t>約1,330万円</a:t>
                       </a:r>
                     </a:p>
                   </a:txBody>
@@ -7638,115 +8352,14 @@
       </p:graphicFrame>
       <p:sp>
         <p:nvSpPr>
-          <p:cNvPr id="9" name="Rectangle 8"/>
-          <p:cNvSpPr/>
-          <p:nvPr/>
-        </p:nvSpPr>
-        <p:spPr>
-          <a:xfrm>
-            <a:off x="640080" y="4206240"/>
-            <a:ext cx="10881360" cy="1051560"/>
-          </a:xfrm>
-          <a:prstGeom prst="rect">
-            <a:avLst/>
-          </a:prstGeom>
-          <a:solidFill>
-            <a:srgbClr val="FBEAEB"/>
-          </a:solidFill>
-          <a:ln>
-            <a:noFill/>
-          </a:ln>
-          <a:effectLst/>
-        </p:spPr>
-        <p:style>
-          <a:lnRef idx="1">
-            <a:schemeClr val="accent1"/>
-          </a:lnRef>
-          <a:fillRef idx="3">
-            <a:schemeClr val="accent1"/>
-          </a:fillRef>
-          <a:effectRef idx="2">
-            <a:schemeClr val="accent1"/>
-          </a:effectRef>
-          <a:fontRef idx="minor">
-            <a:schemeClr val="lt1"/>
-          </a:fontRef>
-        </p:style>
-        <p:txBody>
-          <a:bodyPr rtlCol="0" anchor="ctr"/>
-          <a:lstStyle/>
-          <a:p>
-            <a:pPr algn="ctr"/>
-          </a:p>
-        </p:txBody>
-      </p:sp>
-      <p:sp>
-        <p:nvSpPr>
-          <p:cNvPr id="10" name="TextBox 9"/>
+          <p:cNvPr id="9" name="TextBox 8"/>
           <p:cNvSpPr txBox="1"/>
           <p:nvPr/>
         </p:nvSpPr>
         <p:spPr>
           <a:xfrm>
-            <a:off x="914400" y="4370832"/>
-            <a:ext cx="10332720" cy="777240"/>
-          </a:xfrm>
-          <a:prstGeom prst="rect">
-            <a:avLst/>
-          </a:prstGeom>
-          <a:noFill/>
-        </p:spPr>
-        <p:txBody>
-          <a:bodyPr wrap="square" anchor="t" lIns="0" rIns="0" tIns="0" bIns="0">
-            <a:spAutoFit/>
-          </a:bodyPr>
-          <a:lstStyle/>
-          <a:p>
-            <a:pPr algn="l">
-              <a:spcAft>
-                <a:spcPts val="400"/>
-              </a:spcAft>
-            </a:pPr>
-            <a:r>
-              <a:rPr sz="1350" b="0">
-                <a:solidFill>
-                  <a:srgbClr val="1A1A1A"/>
-                </a:solidFill>
-                <a:latin typeface="Meiryo"/>
-                <a:ea typeface="Meiryo"/>
-              </a:rPr>
-              <a:t>固定でお支払いいただくのは①1,650万円のみ。②③は実施・作成した分だけの従量型のため、</a:t>
-            </a:r>
-          </a:p>
-          <a:p>
-            <a:pPr algn="l">
-              <a:spcAft>
-                <a:spcPts val="400"/>
-              </a:spcAft>
-            </a:pPr>
-            <a:r>
-              <a:rPr sz="1400" b="1">
-                <a:solidFill>
-                  <a:srgbClr val="C00000"/>
-                </a:solidFill>
-                <a:latin typeface="Meiryo"/>
-                <a:ea typeface="Meiryo"/>
-              </a:rPr>
-              <a:t>展開規模を貴社側でコントロールしながらご活用いただけます。</a:t>
-            </a:r>
-          </a:p>
-        </p:txBody>
-      </p:sp>
-      <p:sp>
-        <p:nvSpPr>
-          <p:cNvPr id="11" name="TextBox 10"/>
-          <p:cNvSpPr txBox="1"/>
-          <p:nvPr/>
-        </p:nvSpPr>
-        <p:spPr>
-          <a:xfrm>
-            <a:off x="640080" y="5486400"/>
-            <a:ext cx="10881360" cy="548640"/>
+            <a:off x="640080" y="4480560"/>
+            <a:ext cx="10881360" cy="731520"/>
           </a:xfrm>
           <a:prstGeom prst="rect">
             <a:avLst/>
@@ -7765,14 +8378,31 @@
               </a:spcAft>
             </a:pPr>
             <a:r>
-              <a:rPr sz="1050" b="0">
+              <a:rPr sz="1100" b="0">
                 <a:solidFill>
                   <a:srgbClr val="5A626B"/>
                 </a:solidFill>
                 <a:latin typeface="Meiryo"/>
                 <a:ea typeface="Meiryo"/>
               </a:rPr>
-              <a:t>※金額はすべて税別・概算です。②は実施数、③は作成実績により変動します。訴求ツール作成のロイヤリティはイベント作成物と同水準(10%)です。</a:t>
+              <a:t>※数量・単価は貴社資料(現行IP実績のキット構成・単価、ノベルティ4,000セット時の単価前提)に基づく参考値です。実際の作成計画に応じて変動し、お支払いは作成実績ベースの従量となります。</a:t>
+            </a:r>
+          </a:p>
+          <a:p>
+            <a:pPr algn="l">
+              <a:spcAft>
+                <a:spcPts val="500"/>
+              </a:spcAft>
+            </a:pPr>
+            <a:r>
+              <a:rPr sz="1100" b="0">
+                <a:solidFill>
+                  <a:srgbClr val="5A626B"/>
+                </a:solidFill>
+                <a:latin typeface="Meiryo"/>
+                <a:ea typeface="Meiryo"/>
+              </a:rPr>
+              <a:t>※キット数は「週平均400開催の同時稼働に必要な流通数+消耗・デザイン更新分」として設定しています。</a:t>
             </a:r>
           </a:p>
         </p:txBody>
@@ -7854,7 +8484,7 @@
                 <a:latin typeface="Meiryo"/>
                 <a:ea typeface="Meiryo"/>
               </a:rPr>
-              <a:t>ご確認ポイントへのご回答</a:t>
+              <a:t>年間費用の概算シミュレーション</a:t>
             </a:r>
           </a:p>
         </p:txBody>
@@ -7894,7 +8524,7 @@
                 <a:latin typeface="Meiryo"/>
                 <a:ea typeface="Meiryo"/>
               </a:rPr>
-              <a:t>貴社資料の確認事項3点への回答です</a:t>
+              <a:t>貴社想定の開催数(着ぐるみ600開催/キット20,000開催)をそのまま当てはめた場合の年間概算です</a:t>
             </a:r>
           </a:p>
         </p:txBody>
@@ -8029,7 +8659,7 @@
         </p:nvGraphicFramePr>
         <p:xfrm>
           <a:off x="640080" y="1508760"/>
-          <a:ext cx="10881359" cy="3108960"/>
+          <a:ext cx="10881358" cy="3017520"/>
         </p:xfrm>
         <a:graphic>
           <a:graphicData uri="http://schemas.openxmlformats.org/drawingml/2006/table">
@@ -8038,11 +8668,12 @@
                 <a:tableStyleId>{5C22544A-7EE6-4342-B048-85BDC9FD1C3A}</a:tableStyleId>
               </a:tblPr>
               <a:tblGrid>
-                <a:gridCol w="785252"/>
-                <a:gridCol w="3589727"/>
-                <a:gridCol w="6506380"/>
+                <a:gridCol w="3079630"/>
+                <a:gridCol w="2258395"/>
+                <a:gridCol w="2669012"/>
+                <a:gridCol w="2874321"/>
               </a:tblGrid>
-              <a:tr h="777240">
+              <a:tr h="502920">
                 <a:tc>
                   <a:txBody>
                     <a:bodyPr/>
@@ -8056,7 +8687,7 @@
                           <a:latin typeface="Meiryo"/>
                           <a:ea typeface="Meiryo"/>
                         </a:rPr>
-                        <a:t>No.</a:t>
+                        <a:t>費用項目</a:t>
                       </a:r>
                     </a:p>
                   </a:txBody>
@@ -8079,7 +8710,7 @@
                           <a:latin typeface="Meiryo"/>
                           <a:ea typeface="Meiryo"/>
                         </a:rPr>
-                        <a:t>ご確認内容</a:t>
+                        <a:t>単価・料率</a:t>
                       </a:r>
                     </a:p>
                   </a:txBody>
@@ -8102,7 +8733,7 @@
                           <a:latin typeface="Meiryo"/>
                           <a:ea typeface="Meiryo"/>
                         </a:rPr>
-                        <a:t>ご回答</a:t>
+                        <a:t>貴社想定規模</a:t>
                       </a:r>
                     </a:p>
                   </a:txBody>
@@ -8112,22 +8743,45 @@
                     </a:solidFill>
                   </a:tcPr>
                 </a:tc>
+                <a:tc>
+                  <a:txBody>
+                    <a:bodyPr/>
+                    <a:lstStyle/>
+                    <a:p>
+                      <a:r>
+                        <a:rPr sz="1200" b="1">
+                          <a:solidFill>
+                            <a:srgbClr val="FFFFFF"/>
+                          </a:solidFill>
+                          <a:latin typeface="Meiryo"/>
+                          <a:ea typeface="Meiryo"/>
+                        </a:rPr>
+                        <a:t>年間概算</a:t>
+                      </a:r>
+                    </a:p>
+                  </a:txBody>
+                  <a:tcPr anchor="ctr" marL="73152" marR="73152">
+                    <a:solidFill>
+                      <a:srgbClr val="232278"/>
+                    </a:solidFill>
+                  </a:tcPr>
+                </a:tc>
               </a:tr>
-              <a:tr h="777240">
-                <a:tc>
-                  <a:txBody>
-                    <a:bodyPr/>
-                    <a:lstStyle/>
-                    <a:p>
-                      <a:r>
-                        <a:rPr sz="1150" b="0">
+              <a:tr h="502920">
+                <a:tc>
+                  <a:txBody>
+                    <a:bodyPr/>
+                    <a:lstStyle/>
+                    <a:p>
+                      <a:r>
+                        <a:rPr sz="1200" b="0">
                           <a:solidFill>
                             <a:srgbClr val="1A1A1A"/>
                           </a:solidFill>
                           <a:latin typeface="Meiryo"/>
                           <a:ea typeface="Meiryo"/>
                         </a:rPr>
-                        <a:t>1</a:t>
+                        <a:t>① 年間IP使用料(固定)</a:t>
                       </a:r>
                     </a:p>
                   </a:txBody>
@@ -8143,14 +8797,14 @@
                     <a:lstStyle/>
                     <a:p>
                       <a:r>
-                        <a:rPr sz="1150" b="0">
+                        <a:rPr sz="1200" b="0">
                           <a:solidFill>
                             <a:srgbClr val="1A1A1A"/>
                           </a:solidFill>
                           <a:latin typeface="Meiryo"/>
                           <a:ea typeface="Meiryo"/>
                         </a:rPr>
-                        <a:t>FY26中のテスト実施可否(単体契約 or 短期契約)</a:t>
+                        <a:t>—</a:t>
                       </a:r>
                     </a:p>
                   </a:txBody>
@@ -8166,14 +8820,14 @@
                     <a:lstStyle/>
                     <a:p>
                       <a:r>
-                        <a:rPr sz="1150" b="0">
+                        <a:rPr sz="1200" b="0">
                           <a:solidFill>
                             <a:srgbClr val="1A1A1A"/>
                           </a:solidFill>
                           <a:latin typeface="Meiryo"/>
                           <a:ea typeface="Meiryo"/>
                         </a:rPr>
-                        <a:t>短期・単体契約での対応は可能です。ただし当社の既存ライセンス条件との調整が必要なため、FY26中の実施は形態・会場・時期を個別協議とさせてください。本格開始は2027年4月(FY27期首)を推奨します</a:t>
+                        <a:t>—</a:t>
                       </a:r>
                     </a:p>
                   </a:txBody>
@@ -8183,22 +8837,45 @@
                     </a:solidFill>
                   </a:tcPr>
                 </a:tc>
+                <a:tc>
+                  <a:txBody>
+                    <a:bodyPr/>
+                    <a:lstStyle/>
+                    <a:p>
+                      <a:r>
+                        <a:rPr sz="1200" b="1">
+                          <a:solidFill>
+                            <a:srgbClr val="C00000"/>
+                          </a:solidFill>
+                          <a:latin typeface="Meiryo"/>
+                          <a:ea typeface="Meiryo"/>
+                        </a:rPr>
+                        <a:t>1,650万円</a:t>
+                      </a:r>
+                    </a:p>
+                  </a:txBody>
+                  <a:tcPr anchor="ctr" marL="73152" marR="73152">
+                    <a:solidFill>
+                      <a:srgbClr val="FFFFFF"/>
+                    </a:solidFill>
+                  </a:tcPr>
+                </a:tc>
               </a:tr>
-              <a:tr h="777240">
-                <a:tc>
-                  <a:txBody>
-                    <a:bodyPr/>
-                    <a:lstStyle/>
-                    <a:p>
-                      <a:r>
-                        <a:rPr sz="1150" b="0">
+              <a:tr h="502920">
+                <a:tc>
+                  <a:txBody>
+                    <a:bodyPr/>
+                    <a:lstStyle/>
+                    <a:p>
+                      <a:r>
+                        <a:rPr sz="1200" b="0">
                           <a:solidFill>
                             <a:srgbClr val="1A1A1A"/>
                           </a:solidFill>
                           <a:latin typeface="Meiryo"/>
                           <a:ea typeface="Meiryo"/>
                         </a:rPr>
-                        <a:t>2</a:t>
+                        <a:t>② 着ぐるみイベント</a:t>
                       </a:r>
                     </a:p>
                   </a:txBody>
@@ -8214,14 +8891,14 @@
                     <a:lstStyle/>
                     <a:p>
                       <a:r>
-                        <a:rPr sz="1150" b="0">
+                        <a:rPr sz="1200" b="0">
                           <a:solidFill>
                             <a:srgbClr val="1A1A1A"/>
                           </a:solidFill>
                           <a:latin typeface="Meiryo"/>
                           <a:ea typeface="Meiryo"/>
                         </a:rPr>
-                        <a:t>ノベルティ作成時の費用(ロイヤリティ)発生有無</a:t>
+                        <a:t>15万円/開催(土日)</a:t>
                       </a:r>
                     </a:p>
                   </a:txBody>
@@ -8237,14 +8914,14 @@
                     <a:lstStyle/>
                     <a:p>
                       <a:r>
-                        <a:rPr sz="1150" b="0">
+                        <a:rPr sz="1200" b="0">
                           <a:solidFill>
                             <a:srgbClr val="1A1A1A"/>
                           </a:solidFill>
                           <a:latin typeface="Meiryo"/>
                           <a:ea typeface="Meiryo"/>
                         </a:rPr>
-                        <a:t>発生します。作成費用(税別)の10%をロイヤリティとしてお支払いいただきます(作成数の上限なし)</a:t>
+                        <a:t>600開催/年</a:t>
                       </a:r>
                     </a:p>
                   </a:txBody>
@@ -8254,22 +8931,45 @@
                     </a:solidFill>
                   </a:tcPr>
                 </a:tc>
+                <a:tc>
+                  <a:txBody>
+                    <a:bodyPr/>
+                    <a:lstStyle/>
+                    <a:p>
+                      <a:r>
+                        <a:rPr sz="1200" b="0">
+                          <a:solidFill>
+                            <a:srgbClr val="1A1A1A"/>
+                          </a:solidFill>
+                          <a:latin typeface="Meiryo"/>
+                          <a:ea typeface="Meiryo"/>
+                        </a:rPr>
+                        <a:t>約9,000万円(従量)</a:t>
+                      </a:r>
+                    </a:p>
+                  </a:txBody>
+                  <a:tcPr anchor="ctr" marL="73152" marR="73152">
+                    <a:solidFill>
+                      <a:srgbClr val="F2F4F6"/>
+                    </a:solidFill>
+                  </a:tcPr>
+                </a:tc>
               </a:tr>
-              <a:tr h="777240">
-                <a:tc>
-                  <a:txBody>
-                    <a:bodyPr/>
-                    <a:lstStyle/>
-                    <a:p>
-                      <a:r>
-                        <a:rPr sz="1150" b="0">
+              <a:tr h="502920">
+                <a:tc>
+                  <a:txBody>
+                    <a:bodyPr/>
+                    <a:lstStyle/>
+                    <a:p>
+                      <a:r>
+                        <a:rPr sz="1200" b="0">
                           <a:solidFill>
                             <a:srgbClr val="1A1A1A"/>
                           </a:solidFill>
                           <a:latin typeface="Meiryo"/>
                           <a:ea typeface="Meiryo"/>
                         </a:rPr>
-                        <a:t>3</a:t>
+                        <a:t>  ステージショー(任意)</a:t>
                       </a:r>
                     </a:p>
                   </a:txBody>
@@ -8285,14 +8985,14 @@
                     <a:lstStyle/>
                     <a:p>
                       <a:r>
-                        <a:rPr sz="1150" b="0">
+                        <a:rPr sz="1200" b="0">
                           <a:solidFill>
                             <a:srgbClr val="1A1A1A"/>
                           </a:solidFill>
                           <a:latin typeface="Meiryo"/>
                           <a:ea typeface="Meiryo"/>
                         </a:rPr>
-                        <a:t>イベント実施会場に関する制限事項有無</a:t>
+                        <a:t>30万円〜/回</a:t>
                       </a:r>
                     </a:p>
                   </a:txBody>
@@ -8308,14 +9008,225 @@
                     <a:lstStyle/>
                     <a:p>
                       <a:r>
-                        <a:rPr sz="1150" b="0">
+                        <a:rPr sz="1200" b="0">
                           <a:solidFill>
                             <a:srgbClr val="1A1A1A"/>
                           </a:solidFill>
                           <a:latin typeface="Meiryo"/>
                           <a:ea typeface="Meiryo"/>
                         </a:rPr>
-                        <a:t>①外部から見えない更衣室(控室)のご用意 ②他キャラクターとの同時共存は不可 ③非公式商品の店頭ツール・装飾利用は不可。詳細は運用ガイドラインをご提示します</a:t>
+                        <a:t>年10回程度まで</a:t>
+                      </a:r>
+                    </a:p>
+                  </a:txBody>
+                  <a:tcPr anchor="ctr" marL="73152" marR="73152">
+                    <a:solidFill>
+                      <a:srgbClr val="FFFFFF"/>
+                    </a:solidFill>
+                  </a:tcPr>
+                </a:tc>
+                <a:tc>
+                  <a:txBody>
+                    <a:bodyPr/>
+                    <a:lstStyle/>
+                    <a:p>
+                      <a:r>
+                        <a:rPr sz="1200" b="0">
+                          <a:solidFill>
+                            <a:srgbClr val="1A1A1A"/>
+                          </a:solidFill>
+                          <a:latin typeface="Meiryo"/>
+                          <a:ea typeface="Meiryo"/>
+                        </a:rPr>
+                        <a:t>〜約300万円(任意)</a:t>
+                      </a:r>
+                    </a:p>
+                  </a:txBody>
+                  <a:tcPr anchor="ctr" marL="73152" marR="73152">
+                    <a:solidFill>
+                      <a:srgbClr val="FFFFFF"/>
+                    </a:solidFill>
+                  </a:tcPr>
+                </a:tc>
+              </a:tr>
+              <a:tr h="502920">
+                <a:tc>
+                  <a:txBody>
+                    <a:bodyPr/>
+                    <a:lstStyle/>
+                    <a:p>
+                      <a:r>
+                        <a:rPr sz="1200" b="0">
+                          <a:solidFill>
+                            <a:srgbClr val="1A1A1A"/>
+                          </a:solidFill>
+                          <a:latin typeface="Meiryo"/>
+                          <a:ea typeface="Meiryo"/>
+                        </a:rPr>
+                        <a:t>③ 作成許諾ロイヤリティ</a:t>
+                      </a:r>
+                    </a:p>
+                  </a:txBody>
+                  <a:tcPr anchor="ctr" marL="73152" marR="73152">
+                    <a:solidFill>
+                      <a:srgbClr val="F2F4F6"/>
+                    </a:solidFill>
+                  </a:tcPr>
+                </a:tc>
+                <a:tc>
+                  <a:txBody>
+                    <a:bodyPr/>
+                    <a:lstStyle/>
+                    <a:p>
+                      <a:r>
+                        <a:rPr sz="1200" b="0">
+                          <a:solidFill>
+                            <a:srgbClr val="1A1A1A"/>
+                          </a:solidFill>
+                          <a:latin typeface="Meiryo"/>
+                          <a:ea typeface="Meiryo"/>
+                        </a:rPr>
+                        <a:t>作成費用の10%</a:t>
+                      </a:r>
+                    </a:p>
+                  </a:txBody>
+                  <a:tcPr anchor="ctr" marL="73152" marR="73152">
+                    <a:solidFill>
+                      <a:srgbClr val="F2F4F6"/>
+                    </a:solidFill>
+                  </a:tcPr>
+                </a:tc>
+                <a:tc>
+                  <a:txBody>
+                    <a:bodyPr/>
+                    <a:lstStyle/>
+                    <a:p>
+                      <a:r>
+                        <a:rPr sz="1200" b="0">
+                          <a:solidFill>
+                            <a:srgbClr val="1A1A1A"/>
+                          </a:solidFill>
+                          <a:latin typeface="Meiryo"/>
+                          <a:ea typeface="Meiryo"/>
+                        </a:rPr>
+                        <a:t>キット約500・ノベルティ4,000セット・訴求ツール約3,000店×2回</a:t>
+                      </a:r>
+                    </a:p>
+                  </a:txBody>
+                  <a:tcPr anchor="ctr" marL="73152" marR="73152">
+                    <a:solidFill>
+                      <a:srgbClr val="F2F4F6"/>
+                    </a:solidFill>
+                  </a:tcPr>
+                </a:tc>
+                <a:tc>
+                  <a:txBody>
+                    <a:bodyPr/>
+                    <a:lstStyle/>
+                    <a:p>
+                      <a:r>
+                        <a:rPr sz="1200" b="0">
+                          <a:solidFill>
+                            <a:srgbClr val="1A1A1A"/>
+                          </a:solidFill>
+                          <a:latin typeface="Meiryo"/>
+                          <a:ea typeface="Meiryo"/>
+                        </a:rPr>
+                        <a:t>約1,330万円(従量)</a:t>
+                      </a:r>
+                    </a:p>
+                  </a:txBody>
+                  <a:tcPr anchor="ctr" marL="73152" marR="73152">
+                    <a:solidFill>
+                      <a:srgbClr val="F2F4F6"/>
+                    </a:solidFill>
+                  </a:tcPr>
+                </a:tc>
+              </a:tr>
+              <a:tr h="502920">
+                <a:tc>
+                  <a:txBody>
+                    <a:bodyPr/>
+                    <a:lstStyle/>
+                    <a:p>
+                      <a:r>
+                        <a:rPr sz="1200" b="1">
+                          <a:solidFill>
+                            <a:srgbClr val="1A1A1A"/>
+                          </a:solidFill>
+                          <a:latin typeface="Meiryo"/>
+                          <a:ea typeface="Meiryo"/>
+                        </a:rPr>
+                        <a:t>参考:年間合計(上記想定時)</a:t>
+                      </a:r>
+                    </a:p>
+                  </a:txBody>
+                  <a:tcPr anchor="ctr" marL="73152" marR="73152">
+                    <a:solidFill>
+                      <a:srgbClr val="FFFFFF"/>
+                    </a:solidFill>
+                  </a:tcPr>
+                </a:tc>
+                <a:tc>
+                  <a:txBody>
+                    <a:bodyPr/>
+                    <a:lstStyle/>
+                    <a:p>
+                      <a:r>
+                        <a:rPr sz="1200" b="0">
+                          <a:solidFill>
+                            <a:srgbClr val="1A1A1A"/>
+                          </a:solidFill>
+                          <a:latin typeface="Meiryo"/>
+                          <a:ea typeface="Meiryo"/>
+                        </a:rPr>
+                        <a:t>—</a:t>
+                      </a:r>
+                    </a:p>
+                  </a:txBody>
+                  <a:tcPr anchor="ctr" marL="73152" marR="73152">
+                    <a:solidFill>
+                      <a:srgbClr val="FFFFFF"/>
+                    </a:solidFill>
+                  </a:tcPr>
+                </a:tc>
+                <a:tc>
+                  <a:txBody>
+                    <a:bodyPr/>
+                    <a:lstStyle/>
+                    <a:p>
+                      <a:r>
+                        <a:rPr sz="1200" b="0">
+                          <a:solidFill>
+                            <a:srgbClr val="1A1A1A"/>
+                          </a:solidFill>
+                          <a:latin typeface="Meiryo"/>
+                          <a:ea typeface="Meiryo"/>
+                        </a:rPr>
+                        <a:t>—</a:t>
+                      </a:r>
+                    </a:p>
+                  </a:txBody>
+                  <a:tcPr anchor="ctr" marL="73152" marR="73152">
+                    <a:solidFill>
+                      <a:srgbClr val="FFFFFF"/>
+                    </a:solidFill>
+                  </a:tcPr>
+                </a:tc>
+                <a:tc>
+                  <a:txBody>
+                    <a:bodyPr/>
+                    <a:lstStyle/>
+                    <a:p>
+                      <a:r>
+                        <a:rPr sz="1200" b="1">
+                          <a:solidFill>
+                            <a:srgbClr val="C00000"/>
+                          </a:solidFill>
+                          <a:latin typeface="Meiryo"/>
+                          <a:ea typeface="Meiryo"/>
+                        </a:rPr>
+                        <a:t>約1.2億円</a:t>
                       </a:r>
                     </a:p>
                   </a:txBody>
@@ -8332,13 +9243,114 @@
       </p:graphicFrame>
       <p:sp>
         <p:nvSpPr>
-          <p:cNvPr id="9" name="TextBox 8"/>
+          <p:cNvPr id="9" name="Rectangle 8"/>
+          <p:cNvSpPr/>
+          <p:nvPr/>
+        </p:nvSpPr>
+        <p:spPr>
+          <a:xfrm>
+            <a:off x="640080" y="4709160"/>
+            <a:ext cx="10881360" cy="1005840"/>
+          </a:xfrm>
+          <a:prstGeom prst="rect">
+            <a:avLst/>
+          </a:prstGeom>
+          <a:solidFill>
+            <a:srgbClr val="FBEAEB"/>
+          </a:solidFill>
+          <a:ln>
+            <a:noFill/>
+          </a:ln>
+          <a:effectLst/>
+        </p:spPr>
+        <p:style>
+          <a:lnRef idx="1">
+            <a:schemeClr val="accent1"/>
+          </a:lnRef>
+          <a:fillRef idx="3">
+            <a:schemeClr val="accent1"/>
+          </a:fillRef>
+          <a:effectRef idx="2">
+            <a:schemeClr val="accent1"/>
+          </a:effectRef>
+          <a:fontRef idx="minor">
+            <a:schemeClr val="lt1"/>
+          </a:fontRef>
+        </p:style>
+        <p:txBody>
+          <a:bodyPr rtlCol="0" anchor="ctr"/>
+          <a:lstStyle/>
+          <a:p>
+            <a:pPr algn="ctr"/>
+          </a:p>
+        </p:txBody>
+      </p:sp>
+      <p:sp>
+        <p:nvSpPr>
+          <p:cNvPr id="10" name="TextBox 9"/>
           <p:cNvSpPr txBox="1"/>
           <p:nvPr/>
         </p:nvSpPr>
         <p:spPr>
           <a:xfrm>
-            <a:off x="640080" y="4434840"/>
+            <a:off x="914400" y="4864608"/>
+            <a:ext cx="10332720" cy="777240"/>
+          </a:xfrm>
+          <a:prstGeom prst="rect">
+            <a:avLst/>
+          </a:prstGeom>
+          <a:noFill/>
+        </p:spPr>
+        <p:txBody>
+          <a:bodyPr wrap="square" anchor="t" lIns="0" rIns="0" tIns="0" bIns="0">
+            <a:spAutoFit/>
+          </a:bodyPr>
+          <a:lstStyle/>
+          <a:p>
+            <a:pPr algn="l">
+              <a:spcAft>
+                <a:spcPts val="400"/>
+              </a:spcAft>
+            </a:pPr>
+            <a:r>
+              <a:rPr sz="1350" b="0">
+                <a:solidFill>
+                  <a:srgbClr val="1A1A1A"/>
+                </a:solidFill>
+                <a:latin typeface="Meiryo"/>
+                <a:ea typeface="Meiryo"/>
+              </a:rPr>
+              <a:t>固定でお支払いいただくのは①1,650万円のみ。②③は実施・作成した分だけの従量型のため、</a:t>
+            </a:r>
+          </a:p>
+          <a:p>
+            <a:pPr algn="l">
+              <a:spcAft>
+                <a:spcPts val="400"/>
+              </a:spcAft>
+            </a:pPr>
+            <a:r>
+              <a:rPr sz="1400" b="1">
+                <a:solidFill>
+                  <a:srgbClr val="C00000"/>
+                </a:solidFill>
+                <a:latin typeface="Meiryo"/>
+                <a:ea typeface="Meiryo"/>
+              </a:rPr>
+              <a:t>展開規模を貴社側でコントロールしながらご活用いただけます。</a:t>
+            </a:r>
+          </a:p>
+        </p:txBody>
+      </p:sp>
+      <p:sp>
+        <p:nvSpPr>
+          <p:cNvPr id="11" name="TextBox 10"/>
+          <p:cNvSpPr txBox="1"/>
+          <p:nvPr/>
+        </p:nvSpPr>
+        <p:spPr>
+          <a:xfrm>
+            <a:off x="640080" y="5852160"/>
             <a:ext cx="10881360" cy="548640"/>
           </a:xfrm>
           <a:prstGeom prst="rect">
@@ -8358,14 +9370,14 @@
               </a:spcAft>
             </a:pPr>
             <a:r>
-              <a:rPr sz="1100" b="0">
+              <a:rPr sz="1050" b="0">
                 <a:solidFill>
                   <a:srgbClr val="5A626B"/>
                 </a:solidFill>
                 <a:latin typeface="Meiryo"/>
                 <a:ea typeface="Meiryo"/>
               </a:rPr>
-              <a:t>※着ぐるみの稼働ルール(1回30分×1日最大5回、専属スタッフ2名体制)は、ポケモン様の現行運用と同一の水準で設計しています。</a:t>
+              <a:t>※金額はすべて税別・概算です。②は実施数、③は作成実績により変動します。訴求ツール作成のロイヤリティはイベント作成物と同水準(10%)です。</a:t>
             </a:r>
           </a:p>
         </p:txBody>
@@ -8447,7 +9459,7 @@
                 <a:latin typeface="Meiryo"/>
                 <a:ea typeface="Meiryo"/>
               </a:rPr>
-              <a:t>本お見積りのポイントと次アクション</a:t>
+              <a:t>ご確認ポイントへのご回答</a:t>
             </a:r>
           </a:p>
         </p:txBody>
@@ -8487,7 +9499,7 @@
                 <a:latin typeface="Meiryo"/>
                 <a:ea typeface="Meiryo"/>
               </a:rPr>
-              <a:t>ご予算・運用フローともに現行IP様の座組と同一の形でご導入いただけます</a:t>
+              <a:t>貴社資料の確認事項3点への回答です</a:t>
             </a:r>
           </a:p>
         </p:txBody>
@@ -8612,154 +9624,17 @@
           </a:p>
         </p:txBody>
       </p:sp>
-      <p:sp>
-        <p:nvSpPr>
-          <p:cNvPr id="8" name="Rounded Rectangle 7"/>
-          <p:cNvSpPr/>
-          <p:nvPr/>
-        </p:nvSpPr>
-        <p:spPr>
-          <a:xfrm>
-            <a:off x="640080" y="1554480"/>
-            <a:ext cx="10881360" cy="2103120"/>
-          </a:xfrm>
-          <a:prstGeom prst="roundRect">
-            <a:avLst>
-              <a:gd name="adj" fmla="val 5000"/>
-            </a:avLst>
-          </a:prstGeom>
-          <a:solidFill>
-            <a:srgbClr val="F2F4F6"/>
-          </a:solidFill>
-          <a:ln>
-            <a:noFill/>
-          </a:ln>
-          <a:effectLst/>
-        </p:spPr>
-        <p:style>
-          <a:lnRef idx="1">
-            <a:schemeClr val="accent1"/>
-          </a:lnRef>
-          <a:fillRef idx="3">
-            <a:schemeClr val="accent1"/>
-          </a:fillRef>
-          <a:effectRef idx="2">
-            <a:schemeClr val="accent1"/>
-          </a:effectRef>
-          <a:fontRef idx="minor">
-            <a:schemeClr val="lt1"/>
-          </a:fontRef>
-        </p:style>
-        <p:txBody>
-          <a:bodyPr rtlCol="0" anchor="ctr"/>
-          <a:lstStyle/>
-          <a:p>
-            <a:pPr algn="ctr"/>
-          </a:p>
-        </p:txBody>
-      </p:sp>
-      <p:sp>
-        <p:nvSpPr>
-          <p:cNvPr id="9" name="TextBox 8"/>
-          <p:cNvSpPr txBox="1"/>
-          <p:nvPr/>
-        </p:nvSpPr>
-        <p:spPr>
-          <a:xfrm>
-            <a:off x="914400" y="1737360"/>
-            <a:ext cx="10332720" cy="1828800"/>
-          </a:xfrm>
-          <a:prstGeom prst="rect">
-            <a:avLst/>
-          </a:prstGeom>
-          <a:noFill/>
-        </p:spPr>
-        <p:txBody>
-          <a:bodyPr wrap="square" anchor="t" lIns="0" rIns="0" tIns="0" bIns="0">
-            <a:spAutoFit/>
-          </a:bodyPr>
-          <a:lstStyle/>
-          <a:p>
-            <a:pPr algn="l">
-              <a:spcAft>
-                <a:spcPts val="700"/>
-              </a:spcAft>
-            </a:pPr>
-            <a:r>
-              <a:rPr sz="1400" b="1">
-                <a:solidFill>
-                  <a:srgbClr val="C00000"/>
-                </a:solidFill>
-                <a:latin typeface="Meiryo"/>
-                <a:ea typeface="Meiryo"/>
-              </a:rPr>
-              <a:t>本お見積りのポイント</a:t>
-            </a:r>
-          </a:p>
-          <a:p>
-            <a:pPr algn="l">
-              <a:spcAft>
-                <a:spcPts val="700"/>
-              </a:spcAft>
-            </a:pPr>
-            <a:r>
-              <a:rPr sz="1300" b="0">
-                <a:solidFill>
-                  <a:srgbClr val="1A1A1A"/>
-                </a:solidFill>
-                <a:latin typeface="Meiryo"/>
-                <a:ea typeface="Meiryo"/>
-              </a:rPr>
-              <a:t>・年間IP使用料1,650万円+従量型(着ぐるみ15万円/開催・ロイヤリティ10%)のシンプルな3階建て構造</a:t>
-            </a:r>
-          </a:p>
-          <a:p>
-            <a:pPr algn="l">
-              <a:spcAft>
-                <a:spcPts val="700"/>
-              </a:spcAft>
-            </a:pPr>
-            <a:r>
-              <a:rPr sz="1300" b="0">
-                <a:solidFill>
-                  <a:srgbClr val="1A1A1A"/>
-                </a:solidFill>
-                <a:latin typeface="Meiryo"/>
-                <a:ea typeface="Meiryo"/>
-              </a:rPr>
-              <a:t>・ポケモン様の現行運用(形式・体制・料率)と同一の枠組みのため、貴社・代理店様の運用フロー変更が不要</a:t>
-            </a:r>
-          </a:p>
-          <a:p>
-            <a:pPr algn="l">
-              <a:spcAft>
-                <a:spcPts val="700"/>
-              </a:spcAft>
-            </a:pPr>
-            <a:r>
-              <a:rPr sz="1300" b="0">
-                <a:solidFill>
-                  <a:srgbClr val="1A1A1A"/>
-                </a:solidFill>
-                <a:latin typeface="Meiryo"/>
-                <a:ea typeface="Meiryo"/>
-              </a:rPr>
-              <a:t>・60周年イヤーのウルトラマンで「会いに行ける」店頭集客コンテンツを、固定費を抑えて導入可能</a:t>
-            </a:r>
-          </a:p>
-        </p:txBody>
-      </p:sp>
       <p:graphicFrame>
         <p:nvGraphicFramePr>
-          <p:cNvPr id="10" name="Table 9"/>
+          <p:cNvPr id="8" name="Table 7"/>
           <p:cNvGraphicFramePr>
             <a:graphicFrameLocks noGrp="1"/>
           </p:cNvGraphicFramePr>
           <p:nvPr/>
         </p:nvGraphicFramePr>
         <p:xfrm>
-          <a:off x="640080" y="3931920"/>
-          <a:ext cx="10881359" cy="1828800"/>
+          <a:off x="640080" y="1508760"/>
+          <a:ext cx="10881359" cy="3108960"/>
         </p:xfrm>
         <a:graphic>
           <a:graphicData uri="http://schemas.openxmlformats.org/drawingml/2006/table">
@@ -8768,10 +9643,11 @@
                 <a:tableStyleId>{5C22544A-7EE6-4342-B048-85BDC9FD1C3A}</a:tableStyleId>
               </a:tblPr>
               <a:tblGrid>
-                <a:gridCol w="2863515"/>
-                <a:gridCol w="8017844"/>
+                <a:gridCol w="785252"/>
+                <a:gridCol w="3589727"/>
+                <a:gridCol w="6506380"/>
               </a:tblGrid>
-              <a:tr h="457200">
+              <a:tr h="777240">
                 <a:tc>
                   <a:txBody>
                     <a:bodyPr/>
@@ -8785,7 +9661,7 @@
                           <a:latin typeface="Meiryo"/>
                           <a:ea typeface="Meiryo"/>
                         </a:rPr>
-                        <a:t>時期</a:t>
+                        <a:t>No.</a:t>
                       </a:r>
                     </a:p>
                   </a:txBody>
@@ -8808,7 +9684,7 @@
                           <a:latin typeface="Meiryo"/>
                           <a:ea typeface="Meiryo"/>
                         </a:rPr>
-                        <a:t>アクション</a:t>
+                        <a:t>ご確認内容</a:t>
                       </a:r>
                     </a:p>
                   </a:txBody>
@@ -8818,22 +9694,45 @@
                     </a:solidFill>
                   </a:tcPr>
                 </a:tc>
+                <a:tc>
+                  <a:txBody>
+                    <a:bodyPr/>
+                    <a:lstStyle/>
+                    <a:p>
+                      <a:r>
+                        <a:rPr sz="1200" b="1">
+                          <a:solidFill>
+                            <a:srgbClr val="FFFFFF"/>
+                          </a:solidFill>
+                          <a:latin typeface="Meiryo"/>
+                          <a:ea typeface="Meiryo"/>
+                        </a:rPr>
+                        <a:t>ご回答</a:t>
+                      </a:r>
+                    </a:p>
+                  </a:txBody>
+                  <a:tcPr anchor="ctr" marL="73152" marR="73152">
+                    <a:solidFill>
+                      <a:srgbClr val="232278"/>
+                    </a:solidFill>
+                  </a:tcPr>
+                </a:tc>
               </a:tr>
-              <a:tr h="457200">
-                <a:tc>
-                  <a:txBody>
-                    <a:bodyPr/>
-                    <a:lstStyle/>
-                    <a:p>
-                      <a:r>
-                        <a:rPr sz="1250" b="0">
+              <a:tr h="777240">
+                <a:tc>
+                  <a:txBody>
+                    <a:bodyPr/>
+                    <a:lstStyle/>
+                    <a:p>
+                      <a:r>
+                        <a:rPr sz="1150" b="0">
                           <a:solidFill>
                             <a:srgbClr val="1A1A1A"/>
                           </a:solidFill>
                           <a:latin typeface="Meiryo"/>
                           <a:ea typeface="Meiryo"/>
                         </a:rPr>
-                        <a:t>2026年7月〜8月</a:t>
+                        <a:t>1</a:t>
                       </a:r>
                     </a:p>
                   </a:txBody>
@@ -8849,14 +9748,14 @@
                     <a:lstStyle/>
                     <a:p>
                       <a:r>
-                        <a:rPr sz="1250" b="0">
+                        <a:rPr sz="1150" b="0">
                           <a:solidFill>
                             <a:srgbClr val="1A1A1A"/>
                           </a:solidFill>
                           <a:latin typeface="Meiryo"/>
                           <a:ea typeface="Meiryo"/>
                         </a:rPr>
-                        <a:t>本お見積りのご確認・条件協議(契約書ドラフトのご提示)</a:t>
+                        <a:t>FY26中のテスト実施可否(単体契約 or 短期契約)</a:t>
                       </a:r>
                     </a:p>
                   </a:txBody>
@@ -8866,22 +9765,45 @@
                     </a:solidFill>
                   </a:tcPr>
                 </a:tc>
+                <a:tc>
+                  <a:txBody>
+                    <a:bodyPr/>
+                    <a:lstStyle/>
+                    <a:p>
+                      <a:r>
+                        <a:rPr sz="1150" b="0">
+                          <a:solidFill>
+                            <a:srgbClr val="1A1A1A"/>
+                          </a:solidFill>
+                          <a:latin typeface="Meiryo"/>
+                          <a:ea typeface="Meiryo"/>
+                        </a:rPr>
+                        <a:t>短期・単体契約での対応は可能です。ただし当社の既存ライセンス条件との調整が必要なため、FY26中の実施は形態・会場・時期を個別協議とさせてください。本格開始は2027年4月(FY27期首)を推奨します</a:t>
+                      </a:r>
+                    </a:p>
+                  </a:txBody>
+                  <a:tcPr anchor="ctr" marL="73152" marR="73152">
+                    <a:solidFill>
+                      <a:srgbClr val="FFFFFF"/>
+                    </a:solidFill>
+                  </a:tcPr>
+                </a:tc>
               </a:tr>
-              <a:tr h="457200">
-                <a:tc>
-                  <a:txBody>
-                    <a:bodyPr/>
-                    <a:lstStyle/>
-                    <a:p>
-                      <a:r>
-                        <a:rPr sz="1250" b="0">
+              <a:tr h="777240">
+                <a:tc>
+                  <a:txBody>
+                    <a:bodyPr/>
+                    <a:lstStyle/>
+                    <a:p>
+                      <a:r>
+                        <a:rPr sz="1150" b="0">
                           <a:solidFill>
                             <a:srgbClr val="1A1A1A"/>
                           </a:solidFill>
                           <a:latin typeface="Meiryo"/>
                           <a:ea typeface="Meiryo"/>
                         </a:rPr>
-                        <a:t>2026年9月〜12月</a:t>
+                        <a:t>2</a:t>
                       </a:r>
                     </a:p>
                   </a:txBody>
@@ -8897,14 +9819,14 @@
                     <a:lstStyle/>
                     <a:p>
                       <a:r>
-                        <a:rPr sz="1250" b="0">
+                        <a:rPr sz="1150" b="0">
                           <a:solidFill>
                             <a:srgbClr val="1A1A1A"/>
                           </a:solidFill>
                           <a:latin typeface="Meiryo"/>
                           <a:ea typeface="Meiryo"/>
                         </a:rPr>
-                        <a:t>キット・訴求ツールのデザイン監修、着ぐるみ供給体制の整備、FY26中テストの個別協議</a:t>
+                        <a:t>ノベルティ作成時の費用(ロイヤリティ)発生有無</a:t>
                       </a:r>
                     </a:p>
                   </a:txBody>
@@ -8914,22 +9836,45 @@
                     </a:solidFill>
                   </a:tcPr>
                 </a:tc>
+                <a:tc>
+                  <a:txBody>
+                    <a:bodyPr/>
+                    <a:lstStyle/>
+                    <a:p>
+                      <a:r>
+                        <a:rPr sz="1150" b="0">
+                          <a:solidFill>
+                            <a:srgbClr val="1A1A1A"/>
+                          </a:solidFill>
+                          <a:latin typeface="Meiryo"/>
+                          <a:ea typeface="Meiryo"/>
+                        </a:rPr>
+                        <a:t>発生します。作成費用(税別)の10%をロイヤリティとしてお支払いいただきます(作成数の上限なし)</a:t>
+                      </a:r>
+                    </a:p>
+                  </a:txBody>
+                  <a:tcPr anchor="ctr" marL="73152" marR="73152">
+                    <a:solidFill>
+                      <a:srgbClr val="F2F4F6"/>
+                    </a:solidFill>
+                  </a:tcPr>
+                </a:tc>
               </a:tr>
-              <a:tr h="457200">
-                <a:tc>
-                  <a:txBody>
-                    <a:bodyPr/>
-                    <a:lstStyle/>
-                    <a:p>
-                      <a:r>
-                        <a:rPr sz="1250" b="1">
-                          <a:solidFill>
-                            <a:srgbClr val="C00000"/>
-                          </a:solidFill>
-                          <a:latin typeface="Meiryo"/>
-                          <a:ea typeface="Meiryo"/>
-                        </a:rPr>
-                        <a:t>2027年4月</a:t>
+              <a:tr h="777240">
+                <a:tc>
+                  <a:txBody>
+                    <a:bodyPr/>
+                    <a:lstStyle/>
+                    <a:p>
+                      <a:r>
+                        <a:rPr sz="1150" b="0">
+                          <a:solidFill>
+                            <a:srgbClr val="1A1A1A"/>
+                          </a:solidFill>
+                          <a:latin typeface="Meiryo"/>
+                          <a:ea typeface="Meiryo"/>
+                        </a:rPr>
+                        <a:t>3</a:t>
                       </a:r>
                     </a:p>
                   </a:txBody>
@@ -8945,14 +9890,37 @@
                     <a:lstStyle/>
                     <a:p>
                       <a:r>
-                        <a:rPr sz="1250" b="1">
-                          <a:solidFill>
-                            <a:srgbClr val="C00000"/>
-                          </a:solidFill>
-                          <a:latin typeface="Meiryo"/>
-                          <a:ea typeface="Meiryo"/>
-                        </a:rPr>
-                        <a:t>年間契約開始・全国展開スタート(FY27)</a:t>
+                        <a:rPr sz="1150" b="0">
+                          <a:solidFill>
+                            <a:srgbClr val="1A1A1A"/>
+                          </a:solidFill>
+                          <a:latin typeface="Meiryo"/>
+                          <a:ea typeface="Meiryo"/>
+                        </a:rPr>
+                        <a:t>イベント実施会場に関する制限事項有無</a:t>
+                      </a:r>
+                    </a:p>
+                  </a:txBody>
+                  <a:tcPr anchor="ctr" marL="73152" marR="73152">
+                    <a:solidFill>
+                      <a:srgbClr val="FFFFFF"/>
+                    </a:solidFill>
+                  </a:tcPr>
+                </a:tc>
+                <a:tc>
+                  <a:txBody>
+                    <a:bodyPr/>
+                    <a:lstStyle/>
+                    <a:p>
+                      <a:r>
+                        <a:rPr sz="1150" b="0">
+                          <a:solidFill>
+                            <a:srgbClr val="1A1A1A"/>
+                          </a:solidFill>
+                          <a:latin typeface="Meiryo"/>
+                          <a:ea typeface="Meiryo"/>
+                        </a:rPr>
+                        <a:t>①外部から見えない更衣室(控室)のご用意 ②他キャラクターとの同時共存は不可 ③非公式商品の店頭ツール・装飾利用は不可。詳細は運用ガイドラインをご提示します</a:t>
                       </a:r>
                     </a:p>
                   </a:txBody>
@@ -8967,6 +9935,46 @@
           </a:graphicData>
         </a:graphic>
       </p:graphicFrame>
+      <p:sp>
+        <p:nvSpPr>
+          <p:cNvPr id="9" name="TextBox 8"/>
+          <p:cNvSpPr txBox="1"/>
+          <p:nvPr/>
+        </p:nvSpPr>
+        <p:spPr>
+          <a:xfrm>
+            <a:off x="640080" y="4434840"/>
+            <a:ext cx="10881360" cy="548640"/>
+          </a:xfrm>
+          <a:prstGeom prst="rect">
+            <a:avLst/>
+          </a:prstGeom>
+          <a:noFill/>
+        </p:spPr>
+        <p:txBody>
+          <a:bodyPr wrap="square" anchor="t" lIns="0" rIns="0" tIns="0" bIns="0">
+            <a:spAutoFit/>
+          </a:bodyPr>
+          <a:lstStyle/>
+          <a:p>
+            <a:pPr algn="l">
+              <a:spcAft>
+                <a:spcPts val="500"/>
+              </a:spcAft>
+            </a:pPr>
+            <a:r>
+              <a:rPr sz="1100" b="0">
+                <a:solidFill>
+                  <a:srgbClr val="5A626B"/>
+                </a:solidFill>
+                <a:latin typeface="Meiryo"/>
+                <a:ea typeface="Meiryo"/>
+              </a:rPr>
+              <a:t>※着ぐるみの稼働ルール(1回30分×1日最大5回、専属スタッフ2名体制)は、ポケモン様の現行運用と同一の水準で設計しています。</a:t>
+            </a:r>
+          </a:p>
+        </p:txBody>
+      </p:sp>
     </p:spTree>
   </p:cSld>
   <p:clrMapOvr>

--- a/docs/proposals/softbank-ultraman-caravan/SoftBank様向け_お見積りご回答.pptx
+++ b/docs/proposals/softbank-ultraman-caravan/SoftBank様向け_お見積りご回答.pptx
@@ -3769,7 +3769,7 @@
                 <a:latin typeface="Meiryo"/>
                 <a:ea typeface="Meiryo"/>
               </a:rPr>
-              <a:t>・年間IP使用料1,650万円+従量型(着ぐるみ15万円/開催・ロイヤリティ10%)のシンプルな3階建て構造</a:t>
+              <a:t>・年間IP使用料2,000万円+従量型(着ぐるみ20万円/開催・ロイヤリティ20%)のシンプルな3階建て構造</a:t>
             </a:r>
           </a:p>
           <a:p>
@@ -3786,7 +3786,7 @@
                 <a:latin typeface="Meiryo"/>
                 <a:ea typeface="Meiryo"/>
               </a:rPr>
-              <a:t>・ポケモン様の現行運用(形式・体制・料率)と同一の枠組みのため、貴社・代理店様の運用フロー変更が不要</a:t>
+              <a:t>・ポケモン様の現行運用と同一の枠組み(形式・体制)のため、貴社・代理店様の運用フロー変更が不要</a:t>
             </a:r>
           </a:p>
           <a:p>
@@ -5146,7 +5146,7 @@
                 <a:latin typeface="Meiryo"/>
                 <a:ea typeface="Meiryo"/>
               </a:rPr>
-              <a:t>1,650万円/年</a:t>
+              <a:t>2,000万円/年</a:t>
             </a:r>
           </a:p>
         </p:txBody>
@@ -5289,7 +5289,7 @@
                 <a:latin typeface="Meiryo"/>
                 <a:ea typeface="Meiryo"/>
               </a:rPr>
-              <a:t>15万円/開催(土日2日間)</a:t>
+              <a:t>20万円/開催(土日2日間)</a:t>
             </a:r>
           </a:p>
         </p:txBody>
@@ -5432,7 +5432,7 @@
                 <a:latin typeface="Meiryo"/>
                 <a:ea typeface="Meiryo"/>
               </a:rPr>
-              <a:t>作成費用の10%</a:t>
+              <a:t>作成費用の20%</a:t>
             </a:r>
           </a:p>
         </p:txBody>
@@ -5554,7 +5554,7 @@
                 <a:latin typeface="Meiryo"/>
                 <a:ea typeface="Meiryo"/>
               </a:rPr>
-              <a:t>①年間IP使用料:1,650万円(税別)</a:t>
+              <a:t>①年間IP使用料:2,000万円(税別)</a:t>
             </a:r>
           </a:p>
         </p:txBody>
@@ -5594,7 +5594,7 @@
                 <a:latin typeface="Meiryo"/>
                 <a:ea typeface="Meiryo"/>
               </a:rPr>
-              <a:t>貴社のご予算水準に合わせた年間包括のご提供条件です</a:t>
+              <a:t>60周年イヤーのプレミアムと、通信業種での優先的なお取り組みを含む年間包括のご提供条件です</a:t>
             </a:r>
           </a:p>
         </p:txBody>
@@ -6286,7 +6286,7 @@
                 <a:latin typeface="Meiryo"/>
                 <a:ea typeface="Meiryo"/>
               </a:rPr>
-              <a:t>ポケモン様と同一の運用形式・同水準の費用に設定。貴社店舗・量販店・商業施設での週末稼働に対応します</a:t>
+              <a:t>ポケモン様と同一の運用形式。専属スーツアクターによる造形・演技品質でご提供し、貴社店舗・量販店・商業施設での週末稼働に対応します</a:t>
             </a:r>
           </a:p>
         </p:txBody>
@@ -6566,7 +6566,7 @@
                           <a:latin typeface="Meiryo"/>
                           <a:ea typeface="Meiryo"/>
                         </a:rPr>
-                        <a:t>15万円/開催(土日2日間の概算)。1日のみの場合は8万円</a:t>
+                        <a:t>20万円/開催(土日2日間の概算)。1日のみの場合は10万円</a:t>
                       </a:r>
                     </a:p>
                   </a:txBody>
@@ -6614,7 +6614,7 @@
                           <a:latin typeface="Meiryo"/>
                           <a:ea typeface="Meiryo"/>
                         </a:rPr>
-                        <a:t>着ぐるみ費用+専属スタッフ人件費(ディレクター+アクターの2名体制)</a:t>
+                        <a:t>ヒーロースーツ費用+専属スタッフ人件費(ディレクター+スーツアクターの2名体制)。ポージング・アクション等の演技対応込み</a:t>
                       </a:r>
                     </a:p>
                   </a:txBody>
@@ -6818,7 +6818,7 @@
                 <a:latin typeface="Meiryo"/>
                 <a:ea typeface="Meiryo"/>
               </a:rPr>
-              <a:t>年600開催(貴社想定)の場合、着ぐるみ費用は年間約9,000万円(15万円×600開催、実施数に連動)。</a:t>
+              <a:t>年600開催(貴社想定)の場合、着ぐるみ費用は年間約1億2,000万円(20万円×600開催、実施数に連動)。</a:t>
             </a:r>
           </a:p>
           <a:p>
@@ -6917,7 +6917,7 @@
                 <a:latin typeface="Meiryo"/>
                 <a:ea typeface="Meiryo"/>
               </a:rPr>
-              <a:t>③作成許諾費用:作成費用の10%</a:t>
+              <a:t>③作成許諾費用:作成費用の20%</a:t>
             </a:r>
           </a:p>
         </p:txBody>
@@ -6957,7 +6957,7 @@
                 <a:latin typeface="Meiryo"/>
                 <a:ea typeface="Meiryo"/>
               </a:rPr>
-              <a:t>イベントキット・ノベルティ・店頭訴求ツールの作成主体は貴社。作成費用(税別)の10%をロイヤリティとしてお支払いいただきます</a:t>
+              <a:t>イベントキット・ノベルティ・店頭訴求ツールの作成主体は貴社。作成費用(税別)の20%をロイヤリティとしてお支払いいただきます</a:t>
             </a:r>
           </a:p>
         </p:txBody>
@@ -7189,7 +7189,7 @@
                           <a:latin typeface="Meiryo"/>
                           <a:ea typeface="Meiryo"/>
                         </a:rPr>
-                        <a:t>作成費用(税別)の10%(ポケモン様と同率)</a:t>
+                        <a:t>作成費用(税別)の20%</a:t>
                       </a:r>
                     </a:p>
                   </a:txBody>
@@ -7489,7 +7489,7 @@
                 <a:latin typeface="Meiryo"/>
                 <a:ea typeface="Meiryo"/>
               </a:rPr>
-              <a:t>ノベルティ作成時のロイヤリティは発生します(作成費用の10%)。</a:t>
+              <a:t>ノベルティ作成時のロイヤリティは発生します(作成費用の20%)。</a:t>
             </a:r>
           </a:p>
         </p:txBody>
@@ -7867,7 +7867,7 @@
                           <a:latin typeface="Meiryo"/>
                           <a:ea typeface="Meiryo"/>
                         </a:rPr>
-                        <a:t>ロイヤリティ(10%)</a:t>
+                        <a:t>ロイヤリティ(20%)</a:t>
                       </a:r>
                     </a:p>
                   </a:txBody>
@@ -7984,7 +7984,7 @@
                           <a:latin typeface="Meiryo"/>
                           <a:ea typeface="Meiryo"/>
                         </a:rPr>
-                        <a:t>約780万円</a:t>
+                        <a:t>約1,560万円</a:t>
                       </a:r>
                     </a:p>
                   </a:txBody>
@@ -8101,7 +8101,7 @@
                           <a:latin typeface="Meiryo"/>
                           <a:ea typeface="Meiryo"/>
                         </a:rPr>
-                        <a:t>約400万円</a:t>
+                        <a:t>約800万円</a:t>
                       </a:r>
                     </a:p>
                   </a:txBody>
@@ -8218,7 +8218,7 @@
                           <a:latin typeface="Meiryo"/>
                           <a:ea typeface="Meiryo"/>
                         </a:rPr>
-                        <a:t>約150万円</a:t>
+                        <a:t>約300万円</a:t>
                       </a:r>
                     </a:p>
                   </a:txBody>
@@ -8335,7 +8335,7 @@
                           <a:latin typeface="Meiryo"/>
                           <a:ea typeface="Meiryo"/>
                         </a:rPr>
-                        <a:t>約1,330万円</a:t>
+                        <a:t>約2,660万円</a:t>
                       </a:r>
                     </a:p>
                   </a:txBody>
@@ -8850,7 +8850,7 @@
                           <a:latin typeface="Meiryo"/>
                           <a:ea typeface="Meiryo"/>
                         </a:rPr>
-                        <a:t>1,650万円</a:t>
+                        <a:t>2,000万円</a:t>
                       </a:r>
                     </a:p>
                   </a:txBody>
@@ -8898,7 +8898,7 @@
                           <a:latin typeface="Meiryo"/>
                           <a:ea typeface="Meiryo"/>
                         </a:rPr>
-                        <a:t>15万円/開催(土日)</a:t>
+                        <a:t>20万円/開催(土日)</a:t>
                       </a:r>
                     </a:p>
                   </a:txBody>
@@ -8944,7 +8944,7 @@
                           <a:latin typeface="Meiryo"/>
                           <a:ea typeface="Meiryo"/>
                         </a:rPr>
-                        <a:t>約9,000万円(従量)</a:t>
+                        <a:t>約1億2,000万円(従量)</a:t>
                       </a:r>
                     </a:p>
                   </a:txBody>
@@ -9086,7 +9086,7 @@
                           <a:latin typeface="Meiryo"/>
                           <a:ea typeface="Meiryo"/>
                         </a:rPr>
-                        <a:t>作成費用の10%</a:t>
+                        <a:t>作成費用の20%</a:t>
                       </a:r>
                     </a:p>
                   </a:txBody>
@@ -9132,7 +9132,7 @@
                           <a:latin typeface="Meiryo"/>
                           <a:ea typeface="Meiryo"/>
                         </a:rPr>
-                        <a:t>約1,330万円(従量)</a:t>
+                        <a:t>約2,660万円(従量)</a:t>
                       </a:r>
                     </a:p>
                   </a:txBody>
@@ -9226,7 +9226,7 @@
                           <a:latin typeface="Meiryo"/>
                           <a:ea typeface="Meiryo"/>
                         </a:rPr>
-                        <a:t>約1.2億円</a:t>
+                        <a:t>約1.66億円</a:t>
                       </a:r>
                     </a:p>
                   </a:txBody>
@@ -9320,7 +9320,7 @@
                 <a:latin typeface="Meiryo"/>
                 <a:ea typeface="Meiryo"/>
               </a:rPr>
-              <a:t>固定でお支払いいただくのは①1,650万円のみ。②③は実施・作成した分だけの従量型のため、</a:t>
+              <a:t>固定でお支払いいただくのは①2,000万円のみ。②③は実施・作成した分だけの従量型のため、</a:t>
             </a:r>
           </a:p>
           <a:p>
@@ -9377,7 +9377,7 @@
                 <a:latin typeface="Meiryo"/>
                 <a:ea typeface="Meiryo"/>
               </a:rPr>
-              <a:t>※金額はすべて税別・概算です。②は実施数、③は作成実績により変動します。訴求ツール作成のロイヤリティはイベント作成物と同水準(10%)です。</a:t>
+              <a:t>※金額はすべて税別・概算です。②は実施数、③は作成実績により変動します。訴求ツール作成のロイヤリティはイベント作成物と同水準(20%)です。</a:t>
             </a:r>
           </a:p>
         </p:txBody>
@@ -9849,7 +9849,7 @@
                           <a:latin typeface="Meiryo"/>
                           <a:ea typeface="Meiryo"/>
                         </a:rPr>
-                        <a:t>発生します。作成費用(税別)の10%をロイヤリティとしてお支払いいただきます(作成数の上限なし)</a:t>
+                        <a:t>発生します。作成費用(税別)の20%をロイヤリティとしてお支払いいただきます(作成数の上限なし)</a:t>
                       </a:r>
                     </a:p>
                   </a:txBody>

--- a/docs/proposals/softbank-ultraman-caravan/SoftBank様向け_お見積りご回答.pptx
+++ b/docs/proposals/softbank-ultraman-caravan/SoftBank様向け_お見積りご回答.pptx
@@ -7611,7 +7611,7 @@
                 <a:latin typeface="Meiryo"/>
                 <a:ea typeface="Meiryo"/>
               </a:rPr>
-              <a:t>貴社資料の実績数量・単価(キット構成、ノベルティ4,000セット前提)に基づく参考試算です</a:t>
+              <a:t>キット数は貴社ご提示の800キット、その他は貴社資料の前提に基づく試算です</a:t>
             </a:r>
           </a:p>
         </p:txBody>
@@ -7915,7 +7915,7 @@
                           <a:latin typeface="Meiryo"/>
                           <a:ea typeface="Meiryo"/>
                         </a:rPr>
-                        <a:t>約500キット(週400開催の同時稼働+予備・更新分)</a:t>
+                        <a:t>800キット(貴社ご提示の数量)</a:t>
                       </a:r>
                     </a:p>
                   </a:txBody>
@@ -7961,7 +7961,7 @@
                           <a:latin typeface="Meiryo"/>
                           <a:ea typeface="Meiryo"/>
                         </a:rPr>
-                        <a:t>約7,800万円</a:t>
+                        <a:t>約1億2,400万円</a:t>
                       </a:r>
                     </a:p>
                   </a:txBody>
@@ -7984,7 +7984,7 @@
                           <a:latin typeface="Meiryo"/>
                           <a:ea typeface="Meiryo"/>
                         </a:rPr>
-                        <a:t>約1,560万円</a:t>
+                        <a:t>約2,480万円</a:t>
                       </a:r>
                     </a:p>
                   </a:txBody>
@@ -8312,7 +8312,7 @@
                           <a:latin typeface="Meiryo"/>
                           <a:ea typeface="Meiryo"/>
                         </a:rPr>
-                        <a:t>約1.3億円</a:t>
+                        <a:t>約1.8億円</a:t>
                       </a:r>
                     </a:p>
                   </a:txBody>
@@ -8335,7 +8335,7 @@
                           <a:latin typeface="Meiryo"/>
                           <a:ea typeface="Meiryo"/>
                         </a:rPr>
-                        <a:t>約2,660万円</a:t>
+                        <a:t>約3,570万円</a:t>
                       </a:r>
                     </a:p>
                   </a:txBody>
@@ -8402,7 +8402,7 @@
                 <a:latin typeface="Meiryo"/>
                 <a:ea typeface="Meiryo"/>
               </a:rPr>
-              <a:t>※キット数は「週平均400開催の同時稼働に必要な流通数+消耗・デザイン更新分」として設定しています。</a:t>
+              <a:t>※キット数は貴社ご提示の800キットを反映しています。ノベルティ・訴求ツールは貴社資料の前提に基づく想定値です。</a:t>
             </a:r>
           </a:p>
         </p:txBody>
@@ -9109,7 +9109,7 @@
                           <a:latin typeface="Meiryo"/>
                           <a:ea typeface="Meiryo"/>
                         </a:rPr>
-                        <a:t>キット約500・ノベルティ4,000セット・訴求ツール約3,000店×2回</a:t>
+                        <a:t>キット800・ノベルティ4,000セット・訴求ツール約3,000店×2回</a:t>
                       </a:r>
                     </a:p>
                   </a:txBody>
@@ -9132,7 +9132,7 @@
                           <a:latin typeface="Meiryo"/>
                           <a:ea typeface="Meiryo"/>
                         </a:rPr>
-                        <a:t>約2,660万円(従量)</a:t>
+                        <a:t>約3,570万円(従量)</a:t>
                       </a:r>
                     </a:p>
                   </a:txBody>
@@ -9226,7 +9226,7 @@
                           <a:latin typeface="Meiryo"/>
                           <a:ea typeface="Meiryo"/>
                         </a:rPr>
-                        <a:t>約1.66億円</a:t>
+                        <a:t>約1.76億円</a:t>
                       </a:r>
                     </a:p>
                   </a:txBody>

--- a/docs/proposals/softbank-ultraman-caravan/SoftBank様向け_お見積りご回答.pptx
+++ b/docs/proposals/softbank-ultraman-caravan/SoftBank様向け_お見積りご回答.pptx
@@ -7611,7 +7611,7 @@
                 <a:latin typeface="Meiryo"/>
                 <a:ea typeface="Meiryo"/>
               </a:rPr>
-              <a:t>キット数は貴社ご提示の800キット、その他は貴社資料の前提に基づく試算です</a:t>
+              <a:t>キット800式・ノベルティ約2.1万セット(FY25ご実績)に基づく試算です</a:t>
             </a:r>
           </a:p>
         </p:txBody>
@@ -8032,7 +8032,7 @@
                           <a:latin typeface="Meiryo"/>
                           <a:ea typeface="Meiryo"/>
                         </a:rPr>
-                        <a:t>4,000セット(1セット=A〜D賞+参加賞327個、計約130万個)</a:t>
+                        <a:t>約2.1万セット/年(FY25ご実績:約569万個)</a:t>
                       </a:r>
                     </a:p>
                   </a:txBody>
@@ -8055,7 +8055,7 @@
                           <a:latin typeface="Meiryo"/>
                           <a:ea typeface="Meiryo"/>
                         </a:rPr>
-                        <a:t>約9,900円/セット</a:t>
+                        <a:t>約8,800円/セット(実績)</a:t>
                       </a:r>
                     </a:p>
                   </a:txBody>
@@ -8078,7 +8078,7 @@
                           <a:latin typeface="Meiryo"/>
                           <a:ea typeface="Meiryo"/>
                         </a:rPr>
-                        <a:t>約4,000万円</a:t>
+                        <a:t>約1億8,500万円</a:t>
                       </a:r>
                     </a:p>
                   </a:txBody>
@@ -8101,7 +8101,7 @@
                           <a:latin typeface="Meiryo"/>
                           <a:ea typeface="Meiryo"/>
                         </a:rPr>
-                        <a:t>約800万円</a:t>
+                        <a:t>約3,700万円</a:t>
                       </a:r>
                     </a:p>
                   </a:txBody>
@@ -8312,7 +8312,7 @@
                           <a:latin typeface="Meiryo"/>
                           <a:ea typeface="Meiryo"/>
                         </a:rPr>
-                        <a:t>約1.8億円</a:t>
+                        <a:t>約3.2億円</a:t>
                       </a:r>
                     </a:p>
                   </a:txBody>
@@ -8335,7 +8335,7 @@
                           <a:latin typeface="Meiryo"/>
                           <a:ea typeface="Meiryo"/>
                         </a:rPr>
-                        <a:t>約3,570万円</a:t>
+                        <a:t>約6,480万円</a:t>
                       </a:r>
                     </a:p>
                   </a:txBody>
@@ -8402,7 +8402,7 @@
                 <a:latin typeface="Meiryo"/>
                 <a:ea typeface="Meiryo"/>
               </a:rPr>
-              <a:t>※キット数は貴社ご提示の800キットを反映しています。ノベルティ・訴求ツールは貴社資料の前提に基づく想定値です。</a:t>
+              <a:t>※キット数は貴社ご提示の800式、ノベルティはFY25ご実績(作成費約1.85億円)を反映。店頭訴求ツールは実績数ご共有後に精緻化します。</a:t>
             </a:r>
           </a:p>
         </p:txBody>
@@ -9109,7 +9109,7 @@
                           <a:latin typeface="Meiryo"/>
                           <a:ea typeface="Meiryo"/>
                         </a:rPr>
-                        <a:t>キット800・ノベルティ4,000セット・訴求ツール約3,000店×2回</a:t>
+                        <a:t>キット800式・ノベルティ約2.1万セット(実績)・訴求ツール</a:t>
                       </a:r>
                     </a:p>
                   </a:txBody>
@@ -9132,7 +9132,7 @@
                           <a:latin typeface="Meiryo"/>
                           <a:ea typeface="Meiryo"/>
                         </a:rPr>
-                        <a:t>約3,570万円(従量)</a:t>
+                        <a:t>約6,480万円(従量)</a:t>
                       </a:r>
                     </a:p>
                   </a:txBody>
@@ -9226,7 +9226,7 @@
                           <a:latin typeface="Meiryo"/>
                           <a:ea typeface="Meiryo"/>
                         </a:rPr>
-                        <a:t>約1.76億円</a:t>
+                        <a:t>約2.05億円</a:t>
                       </a:r>
                     </a:p>
                   </a:txBody>

--- a/docs/proposals/softbank-ultraman-caravan/SoftBank様向け_お見積りご回答.pptx
+++ b/docs/proposals/softbank-ultraman-caravan/SoftBank様向け_お見積りご回答.pptx
@@ -8402,7 +8402,7 @@
                 <a:latin typeface="Meiryo"/>
                 <a:ea typeface="Meiryo"/>
               </a:rPr>
-              <a:t>※キット数は貴社ご提示の800式、ノベルティはFY25ご実績(作成費約1.85億円)を反映。店頭訴求ツールは実績数ご共有後に精緻化します。</a:t>
+              <a:t>※キット数は貴社ご提示の800式、ノベルティはFY25ご実績(作成費約1.85億円)を反映。店頭訴求ツールは作成数実績(年間約23.5万部)を受領済み・作成費実額のご共有後に精緻化します。</a:t>
             </a:r>
           </a:p>
         </p:txBody>

--- a/docs/proposals/softbank-ultraman-caravan/SoftBank様向け_お見積りご回答.pptx
+++ b/docs/proposals/softbank-ultraman-caravan/SoftBank様向け_お見積りご回答.pptx
@@ -8385,7 +8385,7 @@
                 <a:latin typeface="Meiryo"/>
                 <a:ea typeface="Meiryo"/>
               </a:rPr>
-              <a:t>※数量・単価は貴社資料(現行IP実績のキット構成・単価、ノベルティ4,000セット時の単価前提)に基づく参考値です。実際の作成計画に応じて変動し、お支払いは作成実績ベースの従量となります。</a:t>
+              <a:t>※キットの数量・単価は貴社資料、ノベルティはFY25ご実績(年約2.1万セット・平均約8,800円/セット)に基づく参考値です。実際の作成計画に応じて変動し、お支払いは作成実績ベースの従量となります。</a:t>
             </a:r>
           </a:p>
           <a:p>
